--- a/치지직 라이브 독 적용 방법.pptx
+++ b/치지직 라이브 독 적용 방법.pptx
@@ -6,6 +6,7 @@
   </p:sldMasterIdLst>
   <p:sldIdLst>
     <p:sldId id="256" r:id="rId2"/>
+    <p:sldId id="257" r:id="rId3"/>
   </p:sldIdLst>
   <p:sldSz cx="12192000" cy="6858000"/>
   <p:notesSz cx="6858000" cy="9144000"/>
@@ -104,6 +105,11 @@
       </a:defRPr>
     </a:lvl9pPr>
   </p:defaultTextStyle>
+  <p:extLst>
+    <p:ext uri="{EFAFB233-063F-42B5-8137-9DF3F51BA10A}">
+      <p15:sldGuideLst xmlns:p15="http://schemas.microsoft.com/office/powerpoint/2012/main"/>
+    </p:ext>
+  </p:extLst>
 </p:presentation>
 </file>
 
@@ -254,7 +260,7 @@
           <a:p>
             <a:fld id="{9021E875-82EE-4D84-97F4-14491609B700}" type="datetimeFigureOut">
               <a:rPr lang="ko-KR" altLang="en-US" smtClean="0"/>
-              <a:t>2026-03-23</a:t>
+              <a:t>2026-03-26</a:t>
             </a:fld>
             <a:endParaRPr lang="ko-KR" altLang="en-US"/>
           </a:p>
@@ -452,7 +458,7 @@
           <a:p>
             <a:fld id="{9021E875-82EE-4D84-97F4-14491609B700}" type="datetimeFigureOut">
               <a:rPr lang="ko-KR" altLang="en-US" smtClean="0"/>
-              <a:t>2026-03-23</a:t>
+              <a:t>2026-03-26</a:t>
             </a:fld>
             <a:endParaRPr lang="ko-KR" altLang="en-US"/>
           </a:p>
@@ -660,7 +666,7 @@
           <a:p>
             <a:fld id="{9021E875-82EE-4D84-97F4-14491609B700}" type="datetimeFigureOut">
               <a:rPr lang="ko-KR" altLang="en-US" smtClean="0"/>
-              <a:t>2026-03-23</a:t>
+              <a:t>2026-03-26</a:t>
             </a:fld>
             <a:endParaRPr lang="ko-KR" altLang="en-US"/>
           </a:p>
@@ -858,7 +864,7 @@
           <a:p>
             <a:fld id="{9021E875-82EE-4D84-97F4-14491609B700}" type="datetimeFigureOut">
               <a:rPr lang="ko-KR" altLang="en-US" smtClean="0"/>
-              <a:t>2026-03-23</a:t>
+              <a:t>2026-03-26</a:t>
             </a:fld>
             <a:endParaRPr lang="ko-KR" altLang="en-US"/>
           </a:p>
@@ -1133,7 +1139,7 @@
           <a:p>
             <a:fld id="{9021E875-82EE-4D84-97F4-14491609B700}" type="datetimeFigureOut">
               <a:rPr lang="ko-KR" altLang="en-US" smtClean="0"/>
-              <a:t>2026-03-23</a:t>
+              <a:t>2026-03-26</a:t>
             </a:fld>
             <a:endParaRPr lang="ko-KR" altLang="en-US"/>
           </a:p>
@@ -1398,7 +1404,7 @@
           <a:p>
             <a:fld id="{9021E875-82EE-4D84-97F4-14491609B700}" type="datetimeFigureOut">
               <a:rPr lang="ko-KR" altLang="en-US" smtClean="0"/>
-              <a:t>2026-03-23</a:t>
+              <a:t>2026-03-26</a:t>
             </a:fld>
             <a:endParaRPr lang="ko-KR" altLang="en-US"/>
           </a:p>
@@ -1810,7 +1816,7 @@
           <a:p>
             <a:fld id="{9021E875-82EE-4D84-97F4-14491609B700}" type="datetimeFigureOut">
               <a:rPr lang="ko-KR" altLang="en-US" smtClean="0"/>
-              <a:t>2026-03-23</a:t>
+              <a:t>2026-03-26</a:t>
             </a:fld>
             <a:endParaRPr lang="ko-KR" altLang="en-US"/>
           </a:p>
@@ -1951,7 +1957,7 @@
           <a:p>
             <a:fld id="{9021E875-82EE-4D84-97F4-14491609B700}" type="datetimeFigureOut">
               <a:rPr lang="ko-KR" altLang="en-US" smtClean="0"/>
-              <a:t>2026-03-23</a:t>
+              <a:t>2026-03-26</a:t>
             </a:fld>
             <a:endParaRPr lang="ko-KR" altLang="en-US"/>
           </a:p>
@@ -2064,7 +2070,7 @@
           <a:p>
             <a:fld id="{9021E875-82EE-4D84-97F4-14491609B700}" type="datetimeFigureOut">
               <a:rPr lang="ko-KR" altLang="en-US" smtClean="0"/>
-              <a:t>2026-03-23</a:t>
+              <a:t>2026-03-26</a:t>
             </a:fld>
             <a:endParaRPr lang="ko-KR" altLang="en-US"/>
           </a:p>
@@ -2375,7 +2381,7 @@
           <a:p>
             <a:fld id="{9021E875-82EE-4D84-97F4-14491609B700}" type="datetimeFigureOut">
               <a:rPr lang="ko-KR" altLang="en-US" smtClean="0"/>
-              <a:t>2026-03-23</a:t>
+              <a:t>2026-03-26</a:t>
             </a:fld>
             <a:endParaRPr lang="ko-KR" altLang="en-US"/>
           </a:p>
@@ -2663,7 +2669,7 @@
           <a:p>
             <a:fld id="{9021E875-82EE-4D84-97F4-14491609B700}" type="datetimeFigureOut">
               <a:rPr lang="ko-KR" altLang="en-US" smtClean="0"/>
-              <a:t>2026-03-23</a:t>
+              <a:t>2026-03-26</a:t>
             </a:fld>
             <a:endParaRPr lang="ko-KR" altLang="en-US"/>
           </a:p>
@@ -2904,7 +2910,7 @@
           <a:p>
             <a:fld id="{9021E875-82EE-4D84-97F4-14491609B700}" type="datetimeFigureOut">
               <a:rPr lang="ko-KR" altLang="en-US" smtClean="0"/>
-              <a:t>2026-03-23</a:t>
+              <a:t>2026-03-26</a:t>
             </a:fld>
             <a:endParaRPr lang="ko-KR" altLang="en-US"/>
           </a:p>
@@ -3344,7 +3350,7 @@
         </p:blipFill>
         <p:spPr>
           <a:xfrm>
-            <a:off x="130003" y="147782"/>
+            <a:off x="337821" y="1893455"/>
             <a:ext cx="3537527" cy="2676899"/>
           </a:xfrm>
           <a:prstGeom prst="rect">
@@ -3374,7 +3380,7 @@
         </p:blipFill>
         <p:spPr>
           <a:xfrm>
-            <a:off x="4563883" y="147782"/>
+            <a:off x="4771701" y="1893455"/>
             <a:ext cx="3959303" cy="2682571"/>
           </a:xfrm>
           <a:prstGeom prst="rect">
@@ -3396,7 +3402,7 @@
         </p:nvSpPr>
         <p:spPr>
           <a:xfrm rot="20075598">
-            <a:off x="3687862" y="1343069"/>
+            <a:off x="3895680" y="3088742"/>
             <a:ext cx="849746" cy="286327"/>
           </a:xfrm>
           <a:prstGeom prst="rightArrow">
@@ -3450,7 +3456,7 @@
         </p:blipFill>
         <p:spPr>
           <a:xfrm>
-            <a:off x="9189077" y="146044"/>
+            <a:off x="9396895" y="1891717"/>
             <a:ext cx="2019582" cy="3924848"/>
           </a:xfrm>
           <a:prstGeom prst="rect">
@@ -3472,7 +3478,7 @@
         </p:nvSpPr>
         <p:spPr>
           <a:xfrm>
-            <a:off x="4557940" y="2824681"/>
+            <a:off x="4765758" y="4570354"/>
             <a:ext cx="3740727" cy="646331"/>
           </a:xfrm>
           <a:prstGeom prst="rect">
@@ -3486,6 +3492,7 @@
           </a:bodyPr>
           <a:lstStyle/>
           <a:p>
+            <a:pPr algn="ctr"/>
             <a:r>
               <a:rPr lang="ko-KR" altLang="en-US" sz="1200" dirty="0"/>
               <a:t>독 이름에 </a:t>
@@ -3521,6 +3528,7 @@
             <a:endParaRPr lang="en-US" altLang="ko-KR" sz="1200" dirty="0"/>
           </a:p>
           <a:p>
+            <a:pPr algn="ctr"/>
             <a:r>
               <a:rPr lang="en-US" altLang="ko-KR" sz="1200" dirty="0"/>
               <a:t>URL</a:t>
@@ -3548,6 +3556,7 @@
             <a:endParaRPr lang="en-US" altLang="ko-KR" sz="1200" dirty="0"/>
           </a:p>
           <a:p>
+            <a:pPr algn="ctr"/>
             <a:r>
               <a:rPr lang="ko-KR" altLang="en-US" sz="1200" dirty="0"/>
               <a:t>적용 클릭</a:t>
@@ -3569,7 +3578,7 @@
         </p:nvSpPr>
         <p:spPr>
           <a:xfrm>
-            <a:off x="130003" y="2824681"/>
+            <a:off x="337821" y="4570354"/>
             <a:ext cx="3537527" cy="276999"/>
           </a:xfrm>
           <a:prstGeom prst="rect">
@@ -3621,7 +3630,7 @@
         </p:nvSpPr>
         <p:spPr>
           <a:xfrm>
-            <a:off x="9189078" y="4070892"/>
+            <a:off x="9396896" y="5816565"/>
             <a:ext cx="2019582" cy="276999"/>
           </a:xfrm>
           <a:prstGeom prst="rect">
@@ -3643,324 +3652,26 @@
           </a:p>
         </p:txBody>
       </p:sp>
-      <p:grpSp>
-        <p:nvGrpSpPr>
-          <p:cNvPr id="24" name="그룹 23">
-            <a:extLst>
-              <a:ext uri="{FF2B5EF4-FFF2-40B4-BE49-F238E27FC236}">
-                <a16:creationId xmlns:a16="http://schemas.microsoft.com/office/drawing/2014/main" id="{661C21B2-237C-CDC8-BFA6-89C08552240E}"/>
-              </a:ext>
-            </a:extLst>
-          </p:cNvPr>
-          <p:cNvGrpSpPr/>
+      <p:sp>
+        <p:nvSpPr>
+          <p:cNvPr id="31" name="타원 30">
+            <a:extLst>
+              <a:ext uri="{FF2B5EF4-FFF2-40B4-BE49-F238E27FC236}">
+                <a16:creationId xmlns:a16="http://schemas.microsoft.com/office/drawing/2014/main" id="{476384B1-15B4-B00D-E382-FAC2A723E15B}"/>
+              </a:ext>
+            </a:extLst>
+          </p:cNvPr>
+          <p:cNvSpPr/>
           <p:nvPr/>
-        </p:nvGrpSpPr>
-        <p:grpSpPr>
-          <a:xfrm>
-            <a:off x="130003" y="3923502"/>
-            <a:ext cx="5623096" cy="2695698"/>
-            <a:chOff x="130002" y="3646503"/>
-            <a:chExt cx="6153622" cy="2950031"/>
-          </a:xfrm>
-        </p:grpSpPr>
-        <p:pic>
-          <p:nvPicPr>
-            <p:cNvPr id="15" name="그림 14">
-              <a:extLst>
-                <a:ext uri="{FF2B5EF4-FFF2-40B4-BE49-F238E27FC236}">
-                  <a16:creationId xmlns:a16="http://schemas.microsoft.com/office/drawing/2014/main" id="{5641C4F2-3E80-ADC9-C8E7-09DB49F05D32}"/>
-                </a:ext>
-              </a:extLst>
-            </p:cNvPr>
-            <p:cNvPicPr>
-              <a:picLocks noChangeAspect="1"/>
-            </p:cNvPicPr>
-            <p:nvPr/>
-          </p:nvPicPr>
-          <p:blipFill>
-            <a:blip r:embed="rId5"/>
-            <a:stretch>
-              <a:fillRect/>
-            </a:stretch>
-          </p:blipFill>
-          <p:spPr>
-            <a:xfrm>
-              <a:off x="130003" y="3646503"/>
-              <a:ext cx="2711108" cy="2646898"/>
-            </a:xfrm>
-            <a:prstGeom prst="rect">
-              <a:avLst/>
-            </a:prstGeom>
-          </p:spPr>
-        </p:pic>
-        <p:pic>
-          <p:nvPicPr>
-            <p:cNvPr id="17" name="그림 16">
-              <a:extLst>
-                <a:ext uri="{FF2B5EF4-FFF2-40B4-BE49-F238E27FC236}">
-                  <a16:creationId xmlns:a16="http://schemas.microsoft.com/office/drawing/2014/main" id="{1496394D-CB59-A3A2-FD3A-73846D8C666E}"/>
-                </a:ext>
-              </a:extLst>
-            </p:cNvPr>
-            <p:cNvPicPr>
-              <a:picLocks noChangeAspect="1"/>
-            </p:cNvPicPr>
-            <p:nvPr/>
-          </p:nvPicPr>
-          <p:blipFill>
-            <a:blip r:embed="rId6"/>
-            <a:srcRect b="1330"/>
-            <a:stretch>
-              <a:fillRect/>
-            </a:stretch>
-          </p:blipFill>
-          <p:spPr>
-            <a:xfrm>
-              <a:off x="3348286" y="3646504"/>
-              <a:ext cx="2632630" cy="2646898"/>
-            </a:xfrm>
-            <a:prstGeom prst="rect">
-              <a:avLst/>
-            </a:prstGeom>
-          </p:spPr>
-        </p:pic>
-        <p:sp>
-          <p:nvSpPr>
-            <p:cNvPr id="19" name="TextBox 18">
-              <a:extLst>
-                <a:ext uri="{FF2B5EF4-FFF2-40B4-BE49-F238E27FC236}">
-                  <a16:creationId xmlns:a16="http://schemas.microsoft.com/office/drawing/2014/main" id="{7E01D04B-BE3D-3525-1AD6-78CF625C7BB0}"/>
-                </a:ext>
-              </a:extLst>
-            </p:cNvPr>
-            <p:cNvSpPr txBox="1"/>
-            <p:nvPr/>
-          </p:nvSpPr>
-          <p:spPr>
-            <a:xfrm>
-              <a:off x="130002" y="6293401"/>
-              <a:ext cx="2711107" cy="276999"/>
-            </a:xfrm>
-            <a:prstGeom prst="rect">
-              <a:avLst/>
-            </a:prstGeom>
-            <a:noFill/>
-          </p:spPr>
-          <p:txBody>
-            <a:bodyPr wrap="square">
-              <a:spAutoFit/>
-            </a:bodyPr>
-            <a:lstStyle/>
-            <a:p>
-              <a:pPr algn="ctr"/>
-              <a:r>
-                <a:rPr lang="ko-KR" altLang="en-US" sz="1200"/>
-                <a:t>설정 열기 클릭</a:t>
-              </a:r>
-              <a:endParaRPr lang="ko-KR" altLang="en-US" sz="1200" dirty="0"/>
-            </a:p>
-          </p:txBody>
-        </p:sp>
-        <p:sp>
-          <p:nvSpPr>
-            <p:cNvPr id="20" name="사각형: 둥근 모서리 19">
-              <a:extLst>
-                <a:ext uri="{FF2B5EF4-FFF2-40B4-BE49-F238E27FC236}">
-                  <a16:creationId xmlns:a16="http://schemas.microsoft.com/office/drawing/2014/main" id="{A6D044ED-785F-3F11-490B-AC54EDEB9B3D}"/>
-                </a:ext>
-              </a:extLst>
-            </p:cNvPr>
-            <p:cNvSpPr/>
-            <p:nvPr/>
-          </p:nvSpPr>
-          <p:spPr>
-            <a:xfrm>
-              <a:off x="130002" y="5209309"/>
-              <a:ext cx="2622435" cy="406400"/>
-            </a:xfrm>
-            <a:prstGeom prst="roundRect">
-              <a:avLst/>
-            </a:prstGeom>
-            <a:noFill/>
-            <a:ln w="28575">
-              <a:solidFill>
-                <a:srgbClr val="FF0000"/>
-              </a:solidFill>
-              <a:prstDash val="dash"/>
-            </a:ln>
-          </p:spPr>
-          <p:style>
-            <a:lnRef idx="2">
-              <a:schemeClr val="accent1">
-                <a:shade val="15000"/>
-              </a:schemeClr>
-            </a:lnRef>
-            <a:fillRef idx="1">
-              <a:schemeClr val="accent1"/>
-            </a:fillRef>
-            <a:effectRef idx="0">
-              <a:schemeClr val="accent1"/>
-            </a:effectRef>
-            <a:fontRef idx="minor">
-              <a:schemeClr val="lt1"/>
-            </a:fontRef>
-          </p:style>
-          <p:txBody>
-            <a:bodyPr rtlCol="0" anchor="ctr"/>
-            <a:lstStyle/>
-            <a:p>
-              <a:pPr algn="ctr"/>
-              <a:endParaRPr lang="ko-KR" altLang="en-US"/>
-            </a:p>
-          </p:txBody>
-        </p:sp>
-        <p:sp>
-          <p:nvSpPr>
-            <p:cNvPr id="21" name="사각형: 둥근 모서리 20">
-              <a:extLst>
-                <a:ext uri="{FF2B5EF4-FFF2-40B4-BE49-F238E27FC236}">
-                  <a16:creationId xmlns:a16="http://schemas.microsoft.com/office/drawing/2014/main" id="{92694B41-B449-A5C0-2EDF-7CFE26BBABA4}"/>
-                </a:ext>
-              </a:extLst>
-            </p:cNvPr>
-            <p:cNvSpPr/>
-            <p:nvPr/>
-          </p:nvSpPr>
-          <p:spPr>
-            <a:xfrm>
-              <a:off x="3538222" y="5809673"/>
-              <a:ext cx="2271452" cy="406400"/>
-            </a:xfrm>
-            <a:prstGeom prst="roundRect">
-              <a:avLst/>
-            </a:prstGeom>
-            <a:noFill/>
-            <a:ln w="28575">
-              <a:solidFill>
-                <a:srgbClr val="FF0000"/>
-              </a:solidFill>
-              <a:prstDash val="dash"/>
-            </a:ln>
-          </p:spPr>
-          <p:style>
-            <a:lnRef idx="2">
-              <a:schemeClr val="accent1">
-                <a:shade val="15000"/>
-              </a:schemeClr>
-            </a:lnRef>
-            <a:fillRef idx="1">
-              <a:schemeClr val="accent1"/>
-            </a:fillRef>
-            <a:effectRef idx="0">
-              <a:schemeClr val="accent1"/>
-            </a:effectRef>
-            <a:fontRef idx="minor">
-              <a:schemeClr val="lt1"/>
-            </a:fontRef>
-          </p:style>
-          <p:txBody>
-            <a:bodyPr rtlCol="0" anchor="ctr"/>
-            <a:lstStyle/>
-            <a:p>
-              <a:pPr algn="ctr"/>
-              <a:endParaRPr lang="ko-KR" altLang="en-US"/>
-            </a:p>
-          </p:txBody>
-        </p:sp>
-        <p:sp>
-          <p:nvSpPr>
-            <p:cNvPr id="22" name="TextBox 21">
-              <a:extLst>
-                <a:ext uri="{FF2B5EF4-FFF2-40B4-BE49-F238E27FC236}">
-                  <a16:creationId xmlns:a16="http://schemas.microsoft.com/office/drawing/2014/main" id="{5E8BB717-1171-7F2B-543A-406666C33081}"/>
-                </a:ext>
-              </a:extLst>
-            </p:cNvPr>
-            <p:cNvSpPr txBox="1"/>
-            <p:nvPr/>
-          </p:nvSpPr>
-          <p:spPr>
-            <a:xfrm>
-              <a:off x="3045579" y="6293401"/>
-              <a:ext cx="3238045" cy="303133"/>
-            </a:xfrm>
-            <a:prstGeom prst="rect">
-              <a:avLst/>
-            </a:prstGeom>
-            <a:noFill/>
-          </p:spPr>
-          <p:txBody>
-            <a:bodyPr wrap="square">
-              <a:spAutoFit/>
-            </a:bodyPr>
-            <a:lstStyle/>
-            <a:p>
-              <a:pPr algn="ctr"/>
-              <a:r>
-                <a:rPr lang="ko-KR" altLang="en-US" sz="1200" dirty="0"/>
-                <a:t>아래 칸에 본인 방송 주소 넣고 저장</a:t>
-              </a:r>
-            </a:p>
-          </p:txBody>
-        </p:sp>
-      </p:grpSp>
-      <p:pic>
-        <p:nvPicPr>
-          <p:cNvPr id="26" name="그림 25">
-            <a:extLst>
-              <a:ext uri="{FF2B5EF4-FFF2-40B4-BE49-F238E27FC236}">
-                <a16:creationId xmlns:a16="http://schemas.microsoft.com/office/drawing/2014/main" id="{F9A1B060-25C1-9442-6936-25C684CAE36F}"/>
-              </a:ext>
-            </a:extLst>
-          </p:cNvPr>
-          <p:cNvPicPr>
-            <a:picLocks noChangeAspect="1"/>
-          </p:cNvPicPr>
-          <p:nvPr/>
-        </p:nvPicPr>
-        <p:blipFill>
-          <a:blip r:embed="rId7"/>
-          <a:stretch>
-            <a:fillRect/>
-          </a:stretch>
-        </p:blipFill>
-        <p:spPr>
-          <a:xfrm>
-            <a:off x="6096000" y="4639154"/>
-            <a:ext cx="2857503" cy="1424837"/>
-          </a:xfrm>
-          <a:prstGeom prst="rect">
+        </p:nvSpPr>
+        <p:spPr>
+          <a:xfrm>
+            <a:off x="190385" y="1742059"/>
+            <a:ext cx="294870" cy="294870"/>
+          </a:xfrm>
+          <a:prstGeom prst="ellipse">
             <a:avLst/>
           </a:prstGeom>
-        </p:spPr>
-      </p:pic>
-      <p:sp>
-        <p:nvSpPr>
-          <p:cNvPr id="27" name="사각형: 둥근 모서리 26">
-            <a:extLst>
-              <a:ext uri="{FF2B5EF4-FFF2-40B4-BE49-F238E27FC236}">
-                <a16:creationId xmlns:a16="http://schemas.microsoft.com/office/drawing/2014/main" id="{165DA55D-D1B9-95F4-EDCF-D88A3613FF18}"/>
-              </a:ext>
-            </a:extLst>
-          </p:cNvPr>
-          <p:cNvSpPr/>
-          <p:nvPr/>
-        </p:nvSpPr>
-        <p:spPr>
-          <a:xfrm>
-            <a:off x="6096000" y="4633482"/>
-            <a:ext cx="1485900" cy="718091"/>
-          </a:xfrm>
-          <a:prstGeom prst="roundRect">
-            <a:avLst/>
-          </a:prstGeom>
-          <a:noFill/>
-          <a:ln w="28575">
-            <a:solidFill>
-              <a:srgbClr val="FF0000"/>
-            </a:solidFill>
-            <a:prstDash val="dash"/>
-          </a:ln>
         </p:spPr>
         <p:style>
           <a:lnRef idx="2">
@@ -3983,114 +3694,20 @@
           <a:lstStyle/>
           <a:p>
             <a:pPr algn="ctr"/>
-            <a:endParaRPr lang="ko-KR" altLang="en-US"/>
-          </a:p>
-        </p:txBody>
-      </p:sp>
-      <p:sp>
-        <p:nvSpPr>
-          <p:cNvPr id="29" name="TextBox 28">
-            <a:extLst>
-              <a:ext uri="{FF2B5EF4-FFF2-40B4-BE49-F238E27FC236}">
-                <a16:creationId xmlns:a16="http://schemas.microsoft.com/office/drawing/2014/main" id="{9885E811-FAF6-E41F-5811-86744CAFCDD6}"/>
-              </a:ext>
-            </a:extLst>
-          </p:cNvPr>
-          <p:cNvSpPr txBox="1"/>
-          <p:nvPr/>
-        </p:nvSpPr>
-        <p:spPr>
-          <a:xfrm>
-            <a:off x="6096000" y="6085858"/>
-            <a:ext cx="2857503" cy="276999"/>
-          </a:xfrm>
-          <a:prstGeom prst="rect">
-            <a:avLst/>
-          </a:prstGeom>
-          <a:noFill/>
-        </p:spPr>
-        <p:txBody>
-          <a:bodyPr wrap="square">
-            <a:spAutoFit/>
-          </a:bodyPr>
-          <a:lstStyle/>
-          <a:p>
-            <a:pPr algn="ctr"/>
-            <a:r>
-              <a:rPr lang="ko-KR" altLang="en-US" sz="1200"/>
-              <a:t>클릭 시 가리고 킬 수 있음</a:t>
-            </a:r>
-            <a:endParaRPr lang="ko-KR" altLang="en-US" sz="1200" dirty="0"/>
-          </a:p>
-        </p:txBody>
-      </p:sp>
-      <p:sp>
-        <p:nvSpPr>
-          <p:cNvPr id="30" name="TextBox 29">
-            <a:extLst>
-              <a:ext uri="{FF2B5EF4-FFF2-40B4-BE49-F238E27FC236}">
-                <a16:creationId xmlns:a16="http://schemas.microsoft.com/office/drawing/2014/main" id="{DBC98B5E-F2CF-0351-2B22-9D04D781141C}"/>
-              </a:ext>
-            </a:extLst>
-          </p:cNvPr>
-          <p:cNvSpPr txBox="1"/>
-          <p:nvPr/>
-        </p:nvSpPr>
-        <p:spPr>
-          <a:xfrm>
-            <a:off x="8953503" y="6388367"/>
-            <a:ext cx="3238497" cy="461665"/>
-          </a:xfrm>
-          <a:prstGeom prst="rect">
-            <a:avLst/>
-          </a:prstGeom>
-          <a:noFill/>
-        </p:spPr>
-        <p:txBody>
-          <a:bodyPr wrap="square">
-            <a:spAutoFit/>
-          </a:bodyPr>
-          <a:lstStyle/>
-          <a:p>
-            <a:pPr algn="r"/>
-            <a:r>
-              <a:rPr lang="en-US" altLang="ko-KR" sz="1200" dirty="0"/>
-              <a:t>*</a:t>
-            </a:r>
-            <a:r>
-              <a:rPr lang="ko-KR" altLang="en-US" sz="1200" dirty="0"/>
-              <a:t>추후 방제</a:t>
-            </a:r>
-            <a:r>
-              <a:rPr lang="en-US" altLang="ko-KR" sz="1200" dirty="0"/>
-              <a:t>, </a:t>
-            </a:r>
-            <a:r>
-              <a:rPr lang="ko-KR" altLang="en-US" sz="1200" dirty="0"/>
-              <a:t>카테고리 등 변경기능 추가 예정</a:t>
-            </a:r>
-            <a:r>
-              <a:rPr lang="en-US" altLang="ko-KR" sz="1200" dirty="0"/>
-              <a:t>(</a:t>
-            </a:r>
-            <a:r>
-              <a:rPr lang="ko-KR" altLang="en-US" sz="1200" dirty="0"/>
-              <a:t>이지만 안될 수도</a:t>
-            </a:r>
-            <a:r>
-              <a:rPr lang="en-US" altLang="ko-KR" sz="1200" dirty="0"/>
-              <a:t>…!)</a:t>
-            </a:r>
-            <a:endParaRPr lang="ko-KR" altLang="en-US" sz="1200" dirty="0"/>
-          </a:p>
-        </p:txBody>
-      </p:sp>
-      <p:sp>
-        <p:nvSpPr>
-          <p:cNvPr id="31" name="타원 30">
-            <a:extLst>
-              <a:ext uri="{FF2B5EF4-FFF2-40B4-BE49-F238E27FC236}">
-                <a16:creationId xmlns:a16="http://schemas.microsoft.com/office/drawing/2014/main" id="{476384B1-15B4-B00D-E382-FAC2A723E15B}"/>
+            <a:r>
+              <a:rPr lang="en-US" altLang="ko-KR" dirty="0"/>
+              <a:t>1</a:t>
+            </a:r>
+            <a:endParaRPr lang="ko-KR" altLang="en-US" dirty="0"/>
+          </a:p>
+        </p:txBody>
+      </p:sp>
+      <p:sp>
+        <p:nvSpPr>
+          <p:cNvPr id="32" name="타원 31">
+            <a:extLst>
+              <a:ext uri="{FF2B5EF4-FFF2-40B4-BE49-F238E27FC236}">
+                <a16:creationId xmlns:a16="http://schemas.microsoft.com/office/drawing/2014/main" id="{F0A49D40-14D5-9ECC-40FF-D3983F6F20F1}"/>
               </a:ext>
             </a:extLst>
           </p:cNvPr>
@@ -4099,7 +3716,7 @@
         </p:nvSpPr>
         <p:spPr>
           <a:xfrm>
-            <a:off x="-17433" y="-3614"/>
+            <a:off x="4646205" y="1742059"/>
             <a:ext cx="294870" cy="294870"/>
           </a:xfrm>
           <a:prstGeom prst="ellipse">
@@ -4129,7 +3746,7 @@
             <a:pPr algn="ctr"/>
             <a:r>
               <a:rPr lang="en-US" altLang="ko-KR" dirty="0"/>
-              <a:t>1</a:t>
+              <a:t>2</a:t>
             </a:r>
             <a:endParaRPr lang="ko-KR" altLang="en-US" dirty="0"/>
           </a:p>
@@ -4137,10 +3754,10 @@
       </p:sp>
       <p:sp>
         <p:nvSpPr>
-          <p:cNvPr id="32" name="타원 31">
-            <a:extLst>
-              <a:ext uri="{FF2B5EF4-FFF2-40B4-BE49-F238E27FC236}">
-                <a16:creationId xmlns:a16="http://schemas.microsoft.com/office/drawing/2014/main" id="{F0A49D40-14D5-9ECC-40FF-D3983F6F20F1}"/>
+          <p:cNvPr id="33" name="타원 32">
+            <a:extLst>
+              <a:ext uri="{FF2B5EF4-FFF2-40B4-BE49-F238E27FC236}">
+                <a16:creationId xmlns:a16="http://schemas.microsoft.com/office/drawing/2014/main" id="{2854C480-14A9-02C3-0CCC-14BCD51461B3}"/>
               </a:ext>
             </a:extLst>
           </p:cNvPr>
@@ -4149,7 +3766,7 @@
         </p:nvSpPr>
         <p:spPr>
           <a:xfrm>
-            <a:off x="4438387" y="-3614"/>
+            <a:off x="9249459" y="1742059"/>
             <a:ext cx="294870" cy="294870"/>
           </a:xfrm>
           <a:prstGeom prst="ellipse">
@@ -4179,7 +3796,7 @@
             <a:pPr algn="ctr"/>
             <a:r>
               <a:rPr lang="en-US" altLang="ko-KR" dirty="0"/>
-              <a:t>2</a:t>
+              <a:t>3</a:t>
             </a:r>
             <a:endParaRPr lang="ko-KR" altLang="en-US" dirty="0"/>
           </a:p>
@@ -4187,10 +3804,49 @@
       </p:sp>
       <p:sp>
         <p:nvSpPr>
-          <p:cNvPr id="33" name="타원 32">
-            <a:extLst>
-              <a:ext uri="{FF2B5EF4-FFF2-40B4-BE49-F238E27FC236}">
-                <a16:creationId xmlns:a16="http://schemas.microsoft.com/office/drawing/2014/main" id="{2854C480-14A9-02C3-0CCC-14BCD51461B3}"/>
+          <p:cNvPr id="9" name="TextBox 8">
+            <a:extLst>
+              <a:ext uri="{FF2B5EF4-FFF2-40B4-BE49-F238E27FC236}">
+                <a16:creationId xmlns:a16="http://schemas.microsoft.com/office/drawing/2014/main" id="{45192AC7-E3F3-FB3F-D9C6-59147F8BEA2C}"/>
+              </a:ext>
+            </a:extLst>
+          </p:cNvPr>
+          <p:cNvSpPr txBox="1"/>
+          <p:nvPr/>
+        </p:nvSpPr>
+        <p:spPr>
+          <a:xfrm>
+            <a:off x="190385" y="216220"/>
+            <a:ext cx="2662908" cy="523220"/>
+          </a:xfrm>
+          <a:prstGeom prst="rect">
+            <a:avLst/>
+          </a:prstGeom>
+          <a:noFill/>
+        </p:spPr>
+        <p:txBody>
+          <a:bodyPr wrap="none" rtlCol="0">
+            <a:spAutoFit/>
+          </a:bodyPr>
+          <a:lstStyle/>
+          <a:p>
+            <a:r>
+              <a:rPr lang="en-US" altLang="ko-KR" sz="2800" b="1" dirty="0"/>
+              <a:t>1. </a:t>
+            </a:r>
+            <a:r>
+              <a:rPr lang="ko-KR" altLang="en-US" sz="2800" b="1" dirty="0"/>
+              <a:t>독 추가 방법</a:t>
+            </a:r>
+          </a:p>
+        </p:txBody>
+      </p:sp>
+      <p:sp>
+        <p:nvSpPr>
+          <p:cNvPr id="11" name="사각형: 둥근 모서리 10">
+            <a:extLst>
+              <a:ext uri="{FF2B5EF4-FFF2-40B4-BE49-F238E27FC236}">
+                <a16:creationId xmlns:a16="http://schemas.microsoft.com/office/drawing/2014/main" id="{EE0E9D9F-6775-0115-E39F-8C115ACCA340}"/>
               </a:ext>
             </a:extLst>
           </p:cNvPr>
@@ -4199,12 +3855,19 @@
         </p:nvSpPr>
         <p:spPr>
           <a:xfrm>
-            <a:off x="9041641" y="-3614"/>
-            <a:ext cx="294870" cy="294870"/>
-          </a:xfrm>
-          <a:prstGeom prst="ellipse">
+            <a:off x="1870363" y="3147742"/>
+            <a:ext cx="2080989" cy="481655"/>
+          </a:xfrm>
+          <a:prstGeom prst="roundRect">
             <a:avLst/>
           </a:prstGeom>
+          <a:noFill/>
+          <a:ln w="28575">
+            <a:solidFill>
+              <a:srgbClr val="FF0000"/>
+            </a:solidFill>
+            <a:prstDash val="dash"/>
+          </a:ln>
         </p:spPr>
         <p:style>
           <a:lnRef idx="2">
@@ -4227,20 +3890,16 @@
           <a:lstStyle/>
           <a:p>
             <a:pPr algn="ctr"/>
-            <a:r>
-              <a:rPr lang="en-US" altLang="ko-KR" dirty="0"/>
-              <a:t>3</a:t>
-            </a:r>
-            <a:endParaRPr lang="ko-KR" altLang="en-US" dirty="0"/>
-          </a:p>
-        </p:txBody>
-      </p:sp>
-      <p:sp>
-        <p:nvSpPr>
-          <p:cNvPr id="34" name="타원 33">
-            <a:extLst>
-              <a:ext uri="{FF2B5EF4-FFF2-40B4-BE49-F238E27FC236}">
-                <a16:creationId xmlns:a16="http://schemas.microsoft.com/office/drawing/2014/main" id="{100B32B0-157F-F1F8-E1C8-80EAD3A35172}"/>
+            <a:endParaRPr lang="ko-KR" altLang="en-US"/>
+          </a:p>
+        </p:txBody>
+      </p:sp>
+      <p:sp>
+        <p:nvSpPr>
+          <p:cNvPr id="14" name="사각형: 둥근 모서리 13">
+            <a:extLst>
+              <a:ext uri="{FF2B5EF4-FFF2-40B4-BE49-F238E27FC236}">
+                <a16:creationId xmlns:a16="http://schemas.microsoft.com/office/drawing/2014/main" id="{BA52DA41-DBFE-42C8-EA4C-A1183775C21E}"/>
               </a:ext>
             </a:extLst>
           </p:cNvPr>
@@ -4249,12 +3908,19 @@
         </p:nvSpPr>
         <p:spPr>
           <a:xfrm>
-            <a:off x="0" y="3756321"/>
-            <a:ext cx="294870" cy="294870"/>
-          </a:xfrm>
-          <a:prstGeom prst="ellipse">
+            <a:off x="1870363" y="2036930"/>
+            <a:ext cx="592284" cy="415325"/>
+          </a:xfrm>
+          <a:prstGeom prst="roundRect">
             <a:avLst/>
           </a:prstGeom>
+          <a:noFill/>
+          <a:ln w="28575">
+            <a:solidFill>
+              <a:srgbClr val="FF0000"/>
+            </a:solidFill>
+            <a:prstDash val="dash"/>
+          </a:ln>
         </p:spPr>
         <p:style>
           <a:lnRef idx="2">
@@ -4277,20 +3943,16 @@
           <a:lstStyle/>
           <a:p>
             <a:pPr algn="ctr"/>
-            <a:r>
-              <a:rPr lang="en-US" altLang="ko-KR" dirty="0"/>
-              <a:t>4</a:t>
-            </a:r>
-            <a:endParaRPr lang="ko-KR" altLang="en-US" dirty="0"/>
-          </a:p>
-        </p:txBody>
-      </p:sp>
-      <p:sp>
-        <p:nvSpPr>
-          <p:cNvPr id="35" name="타원 34">
-            <a:extLst>
-              <a:ext uri="{FF2B5EF4-FFF2-40B4-BE49-F238E27FC236}">
-                <a16:creationId xmlns:a16="http://schemas.microsoft.com/office/drawing/2014/main" id="{D307EDD9-F0EF-E731-9200-B043E5B99588}"/>
+            <a:endParaRPr lang="ko-KR" altLang="en-US"/>
+          </a:p>
+        </p:txBody>
+      </p:sp>
+      <p:sp>
+        <p:nvSpPr>
+          <p:cNvPr id="25" name="사각형: 둥근 모서리 24">
+            <a:extLst>
+              <a:ext uri="{FF2B5EF4-FFF2-40B4-BE49-F238E27FC236}">
+                <a16:creationId xmlns:a16="http://schemas.microsoft.com/office/drawing/2014/main" id="{F04081AB-E46D-AE36-4138-A4D5A6E4A114}"/>
               </a:ext>
             </a:extLst>
           </p:cNvPr>
@@ -4299,12 +3961,19 @@
         </p:nvSpPr>
         <p:spPr>
           <a:xfrm>
-            <a:off x="2949518" y="3756321"/>
-            <a:ext cx="294870" cy="294870"/>
-          </a:xfrm>
-          <a:prstGeom prst="ellipse">
+            <a:off x="4716480" y="2879959"/>
+            <a:ext cx="4014524" cy="247002"/>
+          </a:xfrm>
+          <a:prstGeom prst="roundRect">
             <a:avLst/>
           </a:prstGeom>
+          <a:noFill/>
+          <a:ln w="28575">
+            <a:solidFill>
+              <a:srgbClr val="FF0000"/>
+            </a:solidFill>
+            <a:prstDash val="dash"/>
+          </a:ln>
         </p:spPr>
         <p:style>
           <a:lnRef idx="2">
@@ -4327,20 +3996,16 @@
           <a:lstStyle/>
           <a:p>
             <a:pPr algn="ctr"/>
-            <a:r>
-              <a:rPr lang="en-US" altLang="ko-KR" dirty="0"/>
-              <a:t>5</a:t>
-            </a:r>
-            <a:endParaRPr lang="ko-KR" altLang="en-US" dirty="0"/>
-          </a:p>
-        </p:txBody>
-      </p:sp>
-      <p:sp>
-        <p:nvSpPr>
-          <p:cNvPr id="36" name="타원 35">
-            <a:extLst>
-              <a:ext uri="{FF2B5EF4-FFF2-40B4-BE49-F238E27FC236}">
-                <a16:creationId xmlns:a16="http://schemas.microsoft.com/office/drawing/2014/main" id="{150F11CA-0381-E2D9-FFCC-E6394C5A700D}"/>
+            <a:endParaRPr lang="ko-KR" altLang="en-US"/>
+          </a:p>
+        </p:txBody>
+      </p:sp>
+      <p:sp>
+        <p:nvSpPr>
+          <p:cNvPr id="28" name="사각형: 둥근 모서리 27">
+            <a:extLst>
+              <a:ext uri="{FF2B5EF4-FFF2-40B4-BE49-F238E27FC236}">
+                <a16:creationId xmlns:a16="http://schemas.microsoft.com/office/drawing/2014/main" id="{8E0A196A-1A80-575F-DB45-C5CF2CF5C8AE}"/>
               </a:ext>
             </a:extLst>
           </p:cNvPr>
@@ -4349,12 +4014,19 @@
         </p:nvSpPr>
         <p:spPr>
           <a:xfrm>
-            <a:off x="6014854" y="4370412"/>
-            <a:ext cx="294870" cy="294870"/>
-          </a:xfrm>
-          <a:prstGeom prst="ellipse">
+            <a:off x="9396894" y="5371960"/>
+            <a:ext cx="1987386" cy="381140"/>
+          </a:xfrm>
+          <a:prstGeom prst="roundRect">
             <a:avLst/>
           </a:prstGeom>
+          <a:noFill/>
+          <a:ln w="28575">
+            <a:solidFill>
+              <a:srgbClr val="FF0000"/>
+            </a:solidFill>
+            <a:prstDash val="dash"/>
+          </a:ln>
         </p:spPr>
         <p:style>
           <a:lnRef idx="2">
@@ -4377,11 +4049,7 @@
           <a:lstStyle/>
           <a:p>
             <a:pPr algn="ctr"/>
-            <a:r>
-              <a:rPr lang="en-US" altLang="ko-KR" dirty="0"/>
-              <a:t>6</a:t>
-            </a:r>
-            <a:endParaRPr lang="ko-KR" altLang="en-US" dirty="0"/>
+            <a:endParaRPr lang="ko-KR" altLang="en-US"/>
           </a:p>
         </p:txBody>
       </p:sp>
@@ -4389,6 +4057,960 @@
     <p:extLst>
       <p:ext uri="{BB962C8B-B14F-4D97-AF65-F5344CB8AC3E}">
         <p14:creationId xmlns:p14="http://schemas.microsoft.com/office/powerpoint/2010/main" val="2991111512"/>
+      </p:ext>
+    </p:extLst>
+  </p:cSld>
+  <p:clrMapOvr>
+    <a:masterClrMapping/>
+  </p:clrMapOvr>
+</p:sld>
+</file>
+
+<file path=ppt/slides/slide2.xml><?xml version="1.0" encoding="utf-8"?>
+<p:sld xmlns:a="http://schemas.openxmlformats.org/drawingml/2006/main" xmlns:r="http://schemas.openxmlformats.org/officeDocument/2006/relationships" xmlns:p="http://schemas.openxmlformats.org/presentationml/2006/main">
+  <p:cSld>
+    <p:spTree>
+      <p:nvGrpSpPr>
+        <p:cNvPr id="1" name="">
+          <a:extLst>
+            <a:ext uri="{FF2B5EF4-FFF2-40B4-BE49-F238E27FC236}">
+              <a16:creationId xmlns:a16="http://schemas.microsoft.com/office/drawing/2014/main" id="{9BC90B98-55F8-F74A-4CDC-71A8BCB9D4CF}"/>
+            </a:ext>
+          </a:extLst>
+        </p:cNvPr>
+        <p:cNvGrpSpPr/>
+        <p:nvPr/>
+      </p:nvGrpSpPr>
+      <p:grpSpPr>
+        <a:xfrm>
+          <a:off x="0" y="0"/>
+          <a:ext cx="0" cy="0"/>
+          <a:chOff x="0" y="0"/>
+          <a:chExt cx="0" cy="0"/>
+        </a:xfrm>
+      </p:grpSpPr>
+      <p:pic>
+        <p:nvPicPr>
+          <p:cNvPr id="4" name="그림 3">
+            <a:extLst>
+              <a:ext uri="{FF2B5EF4-FFF2-40B4-BE49-F238E27FC236}">
+                <a16:creationId xmlns:a16="http://schemas.microsoft.com/office/drawing/2014/main" id="{08A12200-8324-D9F4-1F58-31061EE00D44}"/>
+              </a:ext>
+            </a:extLst>
+          </p:cNvPr>
+          <p:cNvPicPr>
+            <a:picLocks noChangeAspect="1"/>
+          </p:cNvPicPr>
+          <p:nvPr/>
+        </p:nvPicPr>
+        <p:blipFill>
+          <a:blip r:embed="rId2"/>
+          <a:stretch>
+            <a:fillRect/>
+          </a:stretch>
+        </p:blipFill>
+        <p:spPr>
+          <a:xfrm>
+            <a:off x="3913338" y="266401"/>
+            <a:ext cx="4591691" cy="6106377"/>
+          </a:xfrm>
+          <a:prstGeom prst="rect">
+            <a:avLst/>
+          </a:prstGeom>
+        </p:spPr>
+      </p:pic>
+      <p:pic>
+        <p:nvPicPr>
+          <p:cNvPr id="3" name="그림 2">
+            <a:extLst>
+              <a:ext uri="{FF2B5EF4-FFF2-40B4-BE49-F238E27FC236}">
+                <a16:creationId xmlns:a16="http://schemas.microsoft.com/office/drawing/2014/main" id="{78C59278-5671-1A4A-99F0-36C6D80805B9}"/>
+              </a:ext>
+            </a:extLst>
+          </p:cNvPr>
+          <p:cNvPicPr>
+            <a:picLocks noChangeAspect="1"/>
+          </p:cNvPicPr>
+          <p:nvPr/>
+        </p:nvPicPr>
+        <p:blipFill>
+          <a:blip r:embed="rId3"/>
+          <a:stretch>
+            <a:fillRect/>
+          </a:stretch>
+        </p:blipFill>
+        <p:spPr>
+          <a:xfrm>
+            <a:off x="213795" y="1010275"/>
+            <a:ext cx="3266270" cy="2113469"/>
+          </a:xfrm>
+          <a:prstGeom prst="rect">
+            <a:avLst/>
+          </a:prstGeom>
+        </p:spPr>
+      </p:pic>
+      <p:pic>
+        <p:nvPicPr>
+          <p:cNvPr id="11" name="그림 10">
+            <a:extLst>
+              <a:ext uri="{FF2B5EF4-FFF2-40B4-BE49-F238E27FC236}">
+                <a16:creationId xmlns:a16="http://schemas.microsoft.com/office/drawing/2014/main" id="{4AE07A83-478A-6072-753A-731BBF83D9B4}"/>
+              </a:ext>
+            </a:extLst>
+          </p:cNvPr>
+          <p:cNvPicPr>
+            <a:picLocks noChangeAspect="1"/>
+          </p:cNvPicPr>
+          <p:nvPr/>
+        </p:nvPicPr>
+        <p:blipFill>
+          <a:blip r:embed="rId4"/>
+          <a:srcRect b="26635"/>
+          <a:stretch>
+            <a:fillRect/>
+          </a:stretch>
+        </p:blipFill>
+        <p:spPr>
+          <a:xfrm>
+            <a:off x="8938302" y="1807881"/>
+            <a:ext cx="3122884" cy="1551453"/>
+          </a:xfrm>
+          <a:prstGeom prst="rect">
+            <a:avLst/>
+          </a:prstGeom>
+        </p:spPr>
+      </p:pic>
+      <p:pic>
+        <p:nvPicPr>
+          <p:cNvPr id="6" name="그림 5">
+            <a:extLst>
+              <a:ext uri="{FF2B5EF4-FFF2-40B4-BE49-F238E27FC236}">
+                <a16:creationId xmlns:a16="http://schemas.microsoft.com/office/drawing/2014/main" id="{41C0D186-D37B-5FBA-DEBC-70A225491ABD}"/>
+              </a:ext>
+            </a:extLst>
+          </p:cNvPr>
+          <p:cNvPicPr>
+            <a:picLocks noChangeAspect="1"/>
+          </p:cNvPicPr>
+          <p:nvPr/>
+        </p:nvPicPr>
+        <p:blipFill>
+          <a:blip r:embed="rId5"/>
+          <a:stretch>
+            <a:fillRect/>
+          </a:stretch>
+        </p:blipFill>
+        <p:spPr>
+          <a:xfrm>
+            <a:off x="488381" y="3877885"/>
+            <a:ext cx="2717099" cy="2302230"/>
+          </a:xfrm>
+          <a:prstGeom prst="rect">
+            <a:avLst/>
+          </a:prstGeom>
+        </p:spPr>
+      </p:pic>
+      <p:sp>
+        <p:nvSpPr>
+          <p:cNvPr id="27" name="사각형: 둥근 모서리 26">
+            <a:extLst>
+              <a:ext uri="{FF2B5EF4-FFF2-40B4-BE49-F238E27FC236}">
+                <a16:creationId xmlns:a16="http://schemas.microsoft.com/office/drawing/2014/main" id="{9A347770-E930-9184-FF06-DDE438B5D5CA}"/>
+              </a:ext>
+            </a:extLst>
+          </p:cNvPr>
+          <p:cNvSpPr/>
+          <p:nvPr/>
+        </p:nvSpPr>
+        <p:spPr>
+          <a:xfrm>
+            <a:off x="408216" y="2451552"/>
+            <a:ext cx="2919682" cy="481655"/>
+          </a:xfrm>
+          <a:prstGeom prst="roundRect">
+            <a:avLst/>
+          </a:prstGeom>
+          <a:noFill/>
+          <a:ln w="28575">
+            <a:solidFill>
+              <a:srgbClr val="FF0000"/>
+            </a:solidFill>
+            <a:prstDash val="dash"/>
+          </a:ln>
+        </p:spPr>
+        <p:style>
+          <a:lnRef idx="2">
+            <a:schemeClr val="accent1">
+              <a:shade val="15000"/>
+            </a:schemeClr>
+          </a:lnRef>
+          <a:fillRef idx="1">
+            <a:schemeClr val="accent1"/>
+          </a:fillRef>
+          <a:effectRef idx="0">
+            <a:schemeClr val="accent1"/>
+          </a:effectRef>
+          <a:fontRef idx="minor">
+            <a:schemeClr val="lt1"/>
+          </a:fontRef>
+        </p:style>
+        <p:txBody>
+          <a:bodyPr rtlCol="0" anchor="ctr"/>
+          <a:lstStyle/>
+          <a:p>
+            <a:pPr algn="ctr"/>
+            <a:endParaRPr lang="ko-KR" altLang="en-US"/>
+          </a:p>
+        </p:txBody>
+      </p:sp>
+      <p:sp>
+        <p:nvSpPr>
+          <p:cNvPr id="29" name="TextBox 28">
+            <a:extLst>
+              <a:ext uri="{FF2B5EF4-FFF2-40B4-BE49-F238E27FC236}">
+                <a16:creationId xmlns:a16="http://schemas.microsoft.com/office/drawing/2014/main" id="{3A7A9109-BB37-67EA-A88C-335D6FC8D5A7}"/>
+              </a:ext>
+            </a:extLst>
+          </p:cNvPr>
+          <p:cNvSpPr txBox="1"/>
+          <p:nvPr/>
+        </p:nvSpPr>
+        <p:spPr>
+          <a:xfrm>
+            <a:off x="418179" y="3132679"/>
+            <a:ext cx="2857503" cy="276999"/>
+          </a:xfrm>
+          <a:prstGeom prst="rect">
+            <a:avLst/>
+          </a:prstGeom>
+          <a:noFill/>
+        </p:spPr>
+        <p:txBody>
+          <a:bodyPr wrap="square">
+            <a:spAutoFit/>
+          </a:bodyPr>
+          <a:lstStyle/>
+          <a:p>
+            <a:pPr algn="ctr"/>
+            <a:r>
+              <a:rPr lang="ko-KR" altLang="en-US" sz="1200" dirty="0"/>
+              <a:t>계정 연동을 위해 네이버 로그인 필요</a:t>
+            </a:r>
+          </a:p>
+        </p:txBody>
+      </p:sp>
+      <p:sp>
+        <p:nvSpPr>
+          <p:cNvPr id="31" name="타원 30">
+            <a:extLst>
+              <a:ext uri="{FF2B5EF4-FFF2-40B4-BE49-F238E27FC236}">
+                <a16:creationId xmlns:a16="http://schemas.microsoft.com/office/drawing/2014/main" id="{ABDC83D6-2C92-BD3E-BEE5-09B26769E038}"/>
+              </a:ext>
+            </a:extLst>
+          </p:cNvPr>
+          <p:cNvSpPr/>
+          <p:nvPr/>
+        </p:nvSpPr>
+        <p:spPr>
+          <a:xfrm>
+            <a:off x="193511" y="862840"/>
+            <a:ext cx="294870" cy="294870"/>
+          </a:xfrm>
+          <a:prstGeom prst="ellipse">
+            <a:avLst/>
+          </a:prstGeom>
+        </p:spPr>
+        <p:style>
+          <a:lnRef idx="2">
+            <a:schemeClr val="accent1">
+              <a:shade val="15000"/>
+            </a:schemeClr>
+          </a:lnRef>
+          <a:fillRef idx="1">
+            <a:schemeClr val="accent1"/>
+          </a:fillRef>
+          <a:effectRef idx="0">
+            <a:schemeClr val="accent1"/>
+          </a:effectRef>
+          <a:fontRef idx="minor">
+            <a:schemeClr val="lt1"/>
+          </a:fontRef>
+        </p:style>
+        <p:txBody>
+          <a:bodyPr rtlCol="0" anchor="ctr"/>
+          <a:lstStyle/>
+          <a:p>
+            <a:pPr algn="ctr"/>
+            <a:r>
+              <a:rPr lang="en-US" altLang="ko-KR" dirty="0"/>
+              <a:t>1</a:t>
+            </a:r>
+            <a:endParaRPr lang="ko-KR" altLang="en-US" dirty="0"/>
+          </a:p>
+        </p:txBody>
+      </p:sp>
+      <p:sp>
+        <p:nvSpPr>
+          <p:cNvPr id="32" name="타원 31">
+            <a:extLst>
+              <a:ext uri="{FF2B5EF4-FFF2-40B4-BE49-F238E27FC236}">
+                <a16:creationId xmlns:a16="http://schemas.microsoft.com/office/drawing/2014/main" id="{382E55A1-5962-180A-917E-0A78F25711AC}"/>
+              </a:ext>
+            </a:extLst>
+          </p:cNvPr>
+          <p:cNvSpPr/>
+          <p:nvPr/>
+        </p:nvSpPr>
+        <p:spPr>
+          <a:xfrm>
+            <a:off x="262177" y="3703811"/>
+            <a:ext cx="294870" cy="294870"/>
+          </a:xfrm>
+          <a:prstGeom prst="ellipse">
+            <a:avLst/>
+          </a:prstGeom>
+        </p:spPr>
+        <p:style>
+          <a:lnRef idx="2">
+            <a:schemeClr val="accent1">
+              <a:shade val="15000"/>
+            </a:schemeClr>
+          </a:lnRef>
+          <a:fillRef idx="1">
+            <a:schemeClr val="accent1"/>
+          </a:fillRef>
+          <a:effectRef idx="0">
+            <a:schemeClr val="accent1"/>
+          </a:effectRef>
+          <a:fontRef idx="minor">
+            <a:schemeClr val="lt1"/>
+          </a:fontRef>
+        </p:style>
+        <p:txBody>
+          <a:bodyPr rtlCol="0" anchor="ctr"/>
+          <a:lstStyle/>
+          <a:p>
+            <a:pPr algn="ctr"/>
+            <a:r>
+              <a:rPr lang="en-US" altLang="ko-KR" dirty="0"/>
+              <a:t>2</a:t>
+            </a:r>
+            <a:endParaRPr lang="ko-KR" altLang="en-US" dirty="0"/>
+          </a:p>
+        </p:txBody>
+      </p:sp>
+      <p:sp>
+        <p:nvSpPr>
+          <p:cNvPr id="33" name="타원 32">
+            <a:extLst>
+              <a:ext uri="{FF2B5EF4-FFF2-40B4-BE49-F238E27FC236}">
+                <a16:creationId xmlns:a16="http://schemas.microsoft.com/office/drawing/2014/main" id="{1A2F855D-672F-CDE6-8312-F837EE6805E5}"/>
+              </a:ext>
+            </a:extLst>
+          </p:cNvPr>
+          <p:cNvSpPr/>
+          <p:nvPr/>
+        </p:nvSpPr>
+        <p:spPr>
+          <a:xfrm>
+            <a:off x="3765903" y="98719"/>
+            <a:ext cx="294870" cy="294870"/>
+          </a:xfrm>
+          <a:prstGeom prst="ellipse">
+            <a:avLst/>
+          </a:prstGeom>
+        </p:spPr>
+        <p:style>
+          <a:lnRef idx="2">
+            <a:schemeClr val="accent1">
+              <a:shade val="15000"/>
+            </a:schemeClr>
+          </a:lnRef>
+          <a:fillRef idx="1">
+            <a:schemeClr val="accent1"/>
+          </a:fillRef>
+          <a:effectRef idx="0">
+            <a:schemeClr val="accent1"/>
+          </a:effectRef>
+          <a:fontRef idx="minor">
+            <a:schemeClr val="lt1"/>
+          </a:fontRef>
+        </p:style>
+        <p:txBody>
+          <a:bodyPr rtlCol="0" anchor="ctr"/>
+          <a:lstStyle/>
+          <a:p>
+            <a:pPr algn="ctr"/>
+            <a:r>
+              <a:rPr lang="en-US" altLang="ko-KR" dirty="0"/>
+              <a:t>3</a:t>
+            </a:r>
+            <a:endParaRPr lang="ko-KR" altLang="en-US" dirty="0"/>
+          </a:p>
+        </p:txBody>
+      </p:sp>
+      <p:sp>
+        <p:nvSpPr>
+          <p:cNvPr id="14" name="TextBox 13">
+            <a:extLst>
+              <a:ext uri="{FF2B5EF4-FFF2-40B4-BE49-F238E27FC236}">
+                <a16:creationId xmlns:a16="http://schemas.microsoft.com/office/drawing/2014/main" id="{A057DDBF-B132-F1DF-29DC-89B36A45AEEC}"/>
+              </a:ext>
+            </a:extLst>
+          </p:cNvPr>
+          <p:cNvSpPr txBox="1"/>
+          <p:nvPr/>
+        </p:nvSpPr>
+        <p:spPr>
+          <a:xfrm>
+            <a:off x="59685" y="6180115"/>
+            <a:ext cx="3574490" cy="461665"/>
+          </a:xfrm>
+          <a:prstGeom prst="rect">
+            <a:avLst/>
+          </a:prstGeom>
+          <a:noFill/>
+        </p:spPr>
+        <p:txBody>
+          <a:bodyPr wrap="square">
+            <a:spAutoFit/>
+          </a:bodyPr>
+          <a:lstStyle/>
+          <a:p>
+            <a:pPr algn="ctr"/>
+            <a:r>
+              <a:rPr lang="ko-KR" altLang="en-US" sz="1200" dirty="0"/>
+              <a:t>정보를 가져오기 위해 필요한 항목들이라 </a:t>
+            </a:r>
+            <a:endParaRPr lang="en-US" altLang="ko-KR" sz="1200" dirty="0"/>
+          </a:p>
+          <a:p>
+            <a:pPr algn="ctr"/>
+            <a:r>
+              <a:rPr lang="ko-KR" altLang="en-US" sz="1200" dirty="0"/>
+              <a:t>전부 동의하셔야 서비스 이용이 가능합니다 </a:t>
+            </a:r>
+          </a:p>
+        </p:txBody>
+      </p:sp>
+      <p:sp>
+        <p:nvSpPr>
+          <p:cNvPr id="15" name="TextBox 14">
+            <a:extLst>
+              <a:ext uri="{FF2B5EF4-FFF2-40B4-BE49-F238E27FC236}">
+                <a16:creationId xmlns:a16="http://schemas.microsoft.com/office/drawing/2014/main" id="{153C0C33-E6FE-4E12-6FB1-3E0309AA1849}"/>
+              </a:ext>
+            </a:extLst>
+          </p:cNvPr>
+          <p:cNvSpPr txBox="1"/>
+          <p:nvPr/>
+        </p:nvSpPr>
+        <p:spPr>
+          <a:xfrm>
+            <a:off x="190385" y="216220"/>
+            <a:ext cx="2662908" cy="523220"/>
+          </a:xfrm>
+          <a:prstGeom prst="rect">
+            <a:avLst/>
+          </a:prstGeom>
+          <a:noFill/>
+        </p:spPr>
+        <p:txBody>
+          <a:bodyPr wrap="none" rtlCol="0">
+            <a:spAutoFit/>
+          </a:bodyPr>
+          <a:lstStyle/>
+          <a:p>
+            <a:r>
+              <a:rPr lang="en-US" altLang="ko-KR" sz="2800" b="1" dirty="0"/>
+              <a:t>2. </a:t>
+            </a:r>
+            <a:r>
+              <a:rPr lang="ko-KR" altLang="en-US" sz="2800" b="1" dirty="0"/>
+              <a:t>독 사용 방법</a:t>
+            </a:r>
+          </a:p>
+        </p:txBody>
+      </p:sp>
+      <p:sp>
+        <p:nvSpPr>
+          <p:cNvPr id="16" name="TextBox 15">
+            <a:extLst>
+              <a:ext uri="{FF2B5EF4-FFF2-40B4-BE49-F238E27FC236}">
+                <a16:creationId xmlns:a16="http://schemas.microsoft.com/office/drawing/2014/main" id="{E4B31753-C55F-E607-0CC7-0F24943073B7}"/>
+              </a:ext>
+            </a:extLst>
+          </p:cNvPr>
+          <p:cNvSpPr txBox="1"/>
+          <p:nvPr/>
+        </p:nvSpPr>
+        <p:spPr>
+          <a:xfrm>
+            <a:off x="8938302" y="880711"/>
+            <a:ext cx="2857503" cy="276999"/>
+          </a:xfrm>
+          <a:prstGeom prst="rect">
+            <a:avLst/>
+          </a:prstGeom>
+          <a:noFill/>
+        </p:spPr>
+        <p:txBody>
+          <a:bodyPr wrap="square">
+            <a:spAutoFit/>
+          </a:bodyPr>
+          <a:lstStyle/>
+          <a:p>
+            <a:r>
+              <a:rPr lang="ko-KR" altLang="en-US" sz="1200"/>
+              <a:t>현재 방송 제목 조회 및 변경 가능</a:t>
+            </a:r>
+            <a:endParaRPr lang="ko-KR" altLang="en-US" sz="1200" dirty="0"/>
+          </a:p>
+        </p:txBody>
+      </p:sp>
+      <p:cxnSp>
+        <p:nvCxnSpPr>
+          <p:cNvPr id="19" name="직선 화살표 연결선 18">
+            <a:extLst>
+              <a:ext uri="{FF2B5EF4-FFF2-40B4-BE49-F238E27FC236}">
+                <a16:creationId xmlns:a16="http://schemas.microsoft.com/office/drawing/2014/main" id="{7E3AEAD5-D422-92AA-5E6E-23988CF9C030}"/>
+              </a:ext>
+            </a:extLst>
+          </p:cNvPr>
+          <p:cNvCxnSpPr>
+            <a:endCxn id="16" idx="1"/>
+          </p:cNvCxnSpPr>
+          <p:nvPr/>
+        </p:nvCxnSpPr>
+        <p:spPr>
+          <a:xfrm flipV="1">
+            <a:off x="8125691" y="1019211"/>
+            <a:ext cx="812611" cy="373171"/>
+          </a:xfrm>
+          <a:prstGeom prst="straightConnector1">
+            <a:avLst/>
+          </a:prstGeom>
+          <a:ln w="28575">
+            <a:solidFill>
+              <a:srgbClr val="FF0000"/>
+            </a:solidFill>
+            <a:tailEnd type="triangle"/>
+          </a:ln>
+        </p:spPr>
+        <p:style>
+          <a:lnRef idx="1">
+            <a:schemeClr val="accent1"/>
+          </a:lnRef>
+          <a:fillRef idx="0">
+            <a:schemeClr val="accent1"/>
+          </a:fillRef>
+          <a:effectRef idx="0">
+            <a:schemeClr val="accent1"/>
+          </a:effectRef>
+          <a:fontRef idx="minor">
+            <a:schemeClr val="tx1"/>
+          </a:fontRef>
+        </p:style>
+      </p:cxnSp>
+      <p:cxnSp>
+        <p:nvCxnSpPr>
+          <p:cNvPr id="20" name="직선 화살표 연결선 19">
+            <a:extLst>
+              <a:ext uri="{FF2B5EF4-FFF2-40B4-BE49-F238E27FC236}">
+                <a16:creationId xmlns:a16="http://schemas.microsoft.com/office/drawing/2014/main" id="{C1A1AC31-93CE-F148-A711-C56948CC5679}"/>
+              </a:ext>
+            </a:extLst>
+          </p:cNvPr>
+          <p:cNvCxnSpPr>
+            <a:cxnSpLocks/>
+            <a:endCxn id="23" idx="1"/>
+          </p:cNvCxnSpPr>
+          <p:nvPr/>
+        </p:nvCxnSpPr>
+        <p:spPr>
+          <a:xfrm flipV="1">
+            <a:off x="8098723" y="1669382"/>
+            <a:ext cx="839578" cy="401946"/>
+          </a:xfrm>
+          <a:prstGeom prst="straightConnector1">
+            <a:avLst/>
+          </a:prstGeom>
+          <a:ln w="28575">
+            <a:solidFill>
+              <a:srgbClr val="FF0000"/>
+            </a:solidFill>
+            <a:tailEnd type="triangle"/>
+          </a:ln>
+        </p:spPr>
+        <p:style>
+          <a:lnRef idx="1">
+            <a:schemeClr val="accent1"/>
+          </a:lnRef>
+          <a:fillRef idx="0">
+            <a:schemeClr val="accent1"/>
+          </a:fillRef>
+          <a:effectRef idx="0">
+            <a:schemeClr val="accent1"/>
+          </a:effectRef>
+          <a:fontRef idx="minor">
+            <a:schemeClr val="tx1"/>
+          </a:fontRef>
+        </p:style>
+      </p:cxnSp>
+      <p:sp>
+        <p:nvSpPr>
+          <p:cNvPr id="23" name="TextBox 22">
+            <a:extLst>
+              <a:ext uri="{FF2B5EF4-FFF2-40B4-BE49-F238E27FC236}">
+                <a16:creationId xmlns:a16="http://schemas.microsoft.com/office/drawing/2014/main" id="{4D862594-7EEA-4579-95D4-A284D1D77A70}"/>
+              </a:ext>
+            </a:extLst>
+          </p:cNvPr>
+          <p:cNvSpPr txBox="1"/>
+          <p:nvPr/>
+        </p:nvSpPr>
+        <p:spPr>
+          <a:xfrm>
+            <a:off x="8938301" y="1530882"/>
+            <a:ext cx="2857503" cy="276999"/>
+          </a:xfrm>
+          <a:prstGeom prst="rect">
+            <a:avLst/>
+          </a:prstGeom>
+          <a:noFill/>
+        </p:spPr>
+        <p:txBody>
+          <a:bodyPr wrap="square">
+            <a:spAutoFit/>
+          </a:bodyPr>
+          <a:lstStyle/>
+          <a:p>
+            <a:r>
+              <a:rPr lang="ko-KR" altLang="en-US" sz="1200"/>
+              <a:t>현재 카테고리 조회 및 변경 가능</a:t>
+            </a:r>
+            <a:endParaRPr lang="ko-KR" altLang="en-US" sz="1200" dirty="0"/>
+          </a:p>
+        </p:txBody>
+      </p:sp>
+      <p:sp>
+        <p:nvSpPr>
+          <p:cNvPr id="25" name="TextBox 24">
+            <a:extLst>
+              <a:ext uri="{FF2B5EF4-FFF2-40B4-BE49-F238E27FC236}">
+                <a16:creationId xmlns:a16="http://schemas.microsoft.com/office/drawing/2014/main" id="{553C6F3F-565D-8DAD-FF4E-3F6E996E0BA1}"/>
+              </a:ext>
+            </a:extLst>
+          </p:cNvPr>
+          <p:cNvSpPr txBox="1"/>
+          <p:nvPr/>
+        </p:nvSpPr>
+        <p:spPr>
+          <a:xfrm>
+            <a:off x="9003817" y="3355260"/>
+            <a:ext cx="2857503" cy="276999"/>
+          </a:xfrm>
+          <a:prstGeom prst="rect">
+            <a:avLst/>
+          </a:prstGeom>
+          <a:noFill/>
+        </p:spPr>
+        <p:txBody>
+          <a:bodyPr wrap="square">
+            <a:spAutoFit/>
+          </a:bodyPr>
+          <a:lstStyle/>
+          <a:p>
+            <a:r>
+              <a:rPr lang="ko-KR" altLang="en-US" sz="1200" dirty="0"/>
+              <a:t>카테고리 검색하여 적용 가능</a:t>
+            </a:r>
+          </a:p>
+        </p:txBody>
+      </p:sp>
+      <p:cxnSp>
+        <p:nvCxnSpPr>
+          <p:cNvPr id="28" name="직선 화살표 연결선 27">
+            <a:extLst>
+              <a:ext uri="{FF2B5EF4-FFF2-40B4-BE49-F238E27FC236}">
+                <a16:creationId xmlns:a16="http://schemas.microsoft.com/office/drawing/2014/main" id="{258405D6-B103-4306-0CF3-678C35DB1A59}"/>
+              </a:ext>
+            </a:extLst>
+          </p:cNvPr>
+          <p:cNvCxnSpPr>
+            <a:cxnSpLocks/>
+            <a:endCxn id="34" idx="1"/>
+          </p:cNvCxnSpPr>
+          <p:nvPr/>
+        </p:nvCxnSpPr>
+        <p:spPr>
+          <a:xfrm>
+            <a:off x="8301876" y="3210862"/>
+            <a:ext cx="701941" cy="879468"/>
+          </a:xfrm>
+          <a:prstGeom prst="straightConnector1">
+            <a:avLst/>
+          </a:prstGeom>
+          <a:ln w="28575">
+            <a:solidFill>
+              <a:srgbClr val="FF0000"/>
+            </a:solidFill>
+            <a:tailEnd type="triangle"/>
+          </a:ln>
+        </p:spPr>
+        <p:style>
+          <a:lnRef idx="1">
+            <a:schemeClr val="accent1"/>
+          </a:lnRef>
+          <a:fillRef idx="0">
+            <a:schemeClr val="accent1"/>
+          </a:fillRef>
+          <a:effectRef idx="0">
+            <a:schemeClr val="accent1"/>
+          </a:effectRef>
+          <a:fontRef idx="minor">
+            <a:schemeClr val="tx1"/>
+          </a:fontRef>
+        </p:style>
+      </p:cxnSp>
+      <p:sp>
+        <p:nvSpPr>
+          <p:cNvPr id="34" name="TextBox 33">
+            <a:extLst>
+              <a:ext uri="{FF2B5EF4-FFF2-40B4-BE49-F238E27FC236}">
+                <a16:creationId xmlns:a16="http://schemas.microsoft.com/office/drawing/2014/main" id="{32732FBD-D33F-BC89-724C-688AF76D7F45}"/>
+              </a:ext>
+            </a:extLst>
+          </p:cNvPr>
+          <p:cNvSpPr txBox="1"/>
+          <p:nvPr/>
+        </p:nvSpPr>
+        <p:spPr>
+          <a:xfrm>
+            <a:off x="9003817" y="3951830"/>
+            <a:ext cx="2857503" cy="276999"/>
+          </a:xfrm>
+          <a:prstGeom prst="rect">
+            <a:avLst/>
+          </a:prstGeom>
+          <a:noFill/>
+        </p:spPr>
+        <p:txBody>
+          <a:bodyPr wrap="square">
+            <a:spAutoFit/>
+          </a:bodyPr>
+          <a:lstStyle/>
+          <a:p>
+            <a:r>
+              <a:rPr lang="ko-KR" altLang="en-US" sz="1200" dirty="0"/>
+              <a:t>현재 태그 조회 및 변경 가능</a:t>
+            </a:r>
+          </a:p>
+        </p:txBody>
+      </p:sp>
+      <p:cxnSp>
+        <p:nvCxnSpPr>
+          <p:cNvPr id="37" name="직선 화살표 연결선 36">
+            <a:extLst>
+              <a:ext uri="{FF2B5EF4-FFF2-40B4-BE49-F238E27FC236}">
+                <a16:creationId xmlns:a16="http://schemas.microsoft.com/office/drawing/2014/main" id="{3BEFD4DD-D3F9-9B32-1FA2-E64E8A4A43DE}"/>
+              </a:ext>
+            </a:extLst>
+          </p:cNvPr>
+          <p:cNvCxnSpPr>
+            <a:cxnSpLocks/>
+            <a:endCxn id="38" idx="1"/>
+          </p:cNvCxnSpPr>
+          <p:nvPr/>
+        </p:nvCxnSpPr>
+        <p:spPr>
+          <a:xfrm>
+            <a:off x="8125691" y="4498868"/>
+            <a:ext cx="878126" cy="546345"/>
+          </a:xfrm>
+          <a:prstGeom prst="straightConnector1">
+            <a:avLst/>
+          </a:prstGeom>
+          <a:ln w="28575">
+            <a:solidFill>
+              <a:srgbClr val="FF0000"/>
+            </a:solidFill>
+            <a:tailEnd type="triangle"/>
+          </a:ln>
+        </p:spPr>
+        <p:style>
+          <a:lnRef idx="1">
+            <a:schemeClr val="accent1"/>
+          </a:lnRef>
+          <a:fillRef idx="0">
+            <a:schemeClr val="accent1"/>
+          </a:fillRef>
+          <a:effectRef idx="0">
+            <a:schemeClr val="accent1"/>
+          </a:effectRef>
+          <a:fontRef idx="minor">
+            <a:schemeClr val="tx1"/>
+          </a:fontRef>
+        </p:style>
+      </p:cxnSp>
+      <p:sp>
+        <p:nvSpPr>
+          <p:cNvPr id="38" name="TextBox 37">
+            <a:extLst>
+              <a:ext uri="{FF2B5EF4-FFF2-40B4-BE49-F238E27FC236}">
+                <a16:creationId xmlns:a16="http://schemas.microsoft.com/office/drawing/2014/main" id="{98875A8A-4459-DC41-3147-6BD7E97C6E73}"/>
+              </a:ext>
+            </a:extLst>
+          </p:cNvPr>
+          <p:cNvSpPr txBox="1"/>
+          <p:nvPr/>
+        </p:nvSpPr>
+        <p:spPr>
+          <a:xfrm>
+            <a:off x="9003817" y="4629714"/>
+            <a:ext cx="3188183" cy="830997"/>
+          </a:xfrm>
+          <a:prstGeom prst="rect">
+            <a:avLst/>
+          </a:prstGeom>
+          <a:noFill/>
+        </p:spPr>
+        <p:txBody>
+          <a:bodyPr wrap="square">
+            <a:spAutoFit/>
+          </a:bodyPr>
+          <a:lstStyle/>
+          <a:p>
+            <a:r>
+              <a:rPr lang="ko-KR" altLang="en-US" sz="1200" dirty="0"/>
+              <a:t>동시시청장</a:t>
+            </a:r>
+            <a:r>
+              <a:rPr lang="en-US" altLang="ko-KR" sz="1200" dirty="0"/>
+              <a:t>, </a:t>
+            </a:r>
+            <a:r>
+              <a:rPr lang="ko-KR" altLang="en-US" sz="1200" dirty="0"/>
+              <a:t>최고시청자</a:t>
+            </a:r>
+            <a:r>
+              <a:rPr lang="en-US" altLang="ko-KR" sz="1200" dirty="0"/>
+              <a:t>, </a:t>
+            </a:r>
+            <a:r>
+              <a:rPr lang="ko-KR" altLang="en-US" sz="1200" dirty="0"/>
+              <a:t>평균시청자</a:t>
+            </a:r>
+            <a:r>
+              <a:rPr lang="en-US" altLang="ko-KR" sz="1200" dirty="0"/>
+              <a:t>, </a:t>
+            </a:r>
+            <a:r>
+              <a:rPr lang="ko-KR" altLang="en-US" sz="1200" dirty="0" err="1"/>
+              <a:t>팔로워</a:t>
+            </a:r>
+            <a:r>
+              <a:rPr lang="ko-KR" altLang="en-US" sz="1200" dirty="0"/>
+              <a:t> 실시간 조회 가능</a:t>
+            </a:r>
+            <a:endParaRPr lang="en-US" altLang="ko-KR" sz="1200" dirty="0"/>
+          </a:p>
+          <a:p>
+            <a:endParaRPr lang="en-US" altLang="ko-KR" sz="1200" dirty="0"/>
+          </a:p>
+          <a:p>
+            <a:r>
+              <a:rPr lang="ko-KR" altLang="en-US" sz="1200" dirty="0"/>
+              <a:t>클릭 시 가림 기능</a:t>
+            </a:r>
+          </a:p>
+        </p:txBody>
+      </p:sp>
+      <p:sp>
+        <p:nvSpPr>
+          <p:cNvPr id="40" name="TextBox 39">
+            <a:extLst>
+              <a:ext uri="{FF2B5EF4-FFF2-40B4-BE49-F238E27FC236}">
+                <a16:creationId xmlns:a16="http://schemas.microsoft.com/office/drawing/2014/main" id="{C2511B67-3C5D-B6CB-76FD-D91622D1DDD5}"/>
+              </a:ext>
+            </a:extLst>
+          </p:cNvPr>
+          <p:cNvSpPr txBox="1"/>
+          <p:nvPr/>
+        </p:nvSpPr>
+        <p:spPr>
+          <a:xfrm>
+            <a:off x="9003817" y="6019754"/>
+            <a:ext cx="2857503" cy="276999"/>
+          </a:xfrm>
+          <a:prstGeom prst="rect">
+            <a:avLst/>
+          </a:prstGeom>
+          <a:noFill/>
+        </p:spPr>
+        <p:txBody>
+          <a:bodyPr wrap="square">
+            <a:spAutoFit/>
+          </a:bodyPr>
+          <a:lstStyle/>
+          <a:p>
+            <a:r>
+              <a:rPr lang="ko-KR" altLang="en-US" sz="1200"/>
+              <a:t>로그아웃 하여 연동 해제</a:t>
+            </a:r>
+            <a:endParaRPr lang="ko-KR" altLang="en-US" sz="1200" dirty="0"/>
+          </a:p>
+        </p:txBody>
+      </p:sp>
+      <p:cxnSp>
+        <p:nvCxnSpPr>
+          <p:cNvPr id="41" name="직선 화살표 연결선 40">
+            <a:extLst>
+              <a:ext uri="{FF2B5EF4-FFF2-40B4-BE49-F238E27FC236}">
+                <a16:creationId xmlns:a16="http://schemas.microsoft.com/office/drawing/2014/main" id="{DAF01846-582F-A9EE-B2A2-F120AFA4BAC6}"/>
+              </a:ext>
+            </a:extLst>
+          </p:cNvPr>
+          <p:cNvCxnSpPr>
+            <a:cxnSpLocks/>
+            <a:endCxn id="40" idx="1"/>
+          </p:cNvCxnSpPr>
+          <p:nvPr/>
+        </p:nvCxnSpPr>
+        <p:spPr>
+          <a:xfrm>
+            <a:off x="8301876" y="6158254"/>
+            <a:ext cx="701941" cy="0"/>
+          </a:xfrm>
+          <a:prstGeom prst="straightConnector1">
+            <a:avLst/>
+          </a:prstGeom>
+          <a:ln w="28575">
+            <a:solidFill>
+              <a:srgbClr val="FF0000"/>
+            </a:solidFill>
+            <a:tailEnd type="triangle"/>
+          </a:ln>
+        </p:spPr>
+        <p:style>
+          <a:lnRef idx="1">
+            <a:schemeClr val="accent1"/>
+          </a:lnRef>
+          <a:fillRef idx="0">
+            <a:schemeClr val="accent1"/>
+          </a:fillRef>
+          <a:effectRef idx="0">
+            <a:schemeClr val="accent1"/>
+          </a:effectRef>
+          <a:fontRef idx="minor">
+            <a:schemeClr val="tx1"/>
+          </a:fontRef>
+        </p:style>
+      </p:cxnSp>
+    </p:spTree>
+    <p:extLst>
+      <p:ext uri="{BB962C8B-B14F-4D97-AF65-F5344CB8AC3E}">
+        <p14:creationId xmlns:p14="http://schemas.microsoft.com/office/powerpoint/2010/main" val="2732685688"/>
       </p:ext>
     </p:extLst>
   </p:cSld>

--- a/치지직 라이브 독 적용 방법.pptx
+++ b/치지직 라이브 독 적용 방법.pptx
@@ -260,7 +260,7 @@
           <a:p>
             <a:fld id="{9021E875-82EE-4D84-97F4-14491609B700}" type="datetimeFigureOut">
               <a:rPr lang="ko-KR" altLang="en-US" smtClean="0"/>
-              <a:t>2026-03-26</a:t>
+              <a:t>2026-05-01</a:t>
             </a:fld>
             <a:endParaRPr lang="ko-KR" altLang="en-US"/>
           </a:p>
@@ -458,7 +458,7 @@
           <a:p>
             <a:fld id="{9021E875-82EE-4D84-97F4-14491609B700}" type="datetimeFigureOut">
               <a:rPr lang="ko-KR" altLang="en-US" smtClean="0"/>
-              <a:t>2026-03-26</a:t>
+              <a:t>2026-05-01</a:t>
             </a:fld>
             <a:endParaRPr lang="ko-KR" altLang="en-US"/>
           </a:p>
@@ -666,7 +666,7 @@
           <a:p>
             <a:fld id="{9021E875-82EE-4D84-97F4-14491609B700}" type="datetimeFigureOut">
               <a:rPr lang="ko-KR" altLang="en-US" smtClean="0"/>
-              <a:t>2026-03-26</a:t>
+              <a:t>2026-05-01</a:t>
             </a:fld>
             <a:endParaRPr lang="ko-KR" altLang="en-US"/>
           </a:p>
@@ -864,7 +864,7 @@
           <a:p>
             <a:fld id="{9021E875-82EE-4D84-97F4-14491609B700}" type="datetimeFigureOut">
               <a:rPr lang="ko-KR" altLang="en-US" smtClean="0"/>
-              <a:t>2026-03-26</a:t>
+              <a:t>2026-05-01</a:t>
             </a:fld>
             <a:endParaRPr lang="ko-KR" altLang="en-US"/>
           </a:p>
@@ -1139,7 +1139,7 @@
           <a:p>
             <a:fld id="{9021E875-82EE-4D84-97F4-14491609B700}" type="datetimeFigureOut">
               <a:rPr lang="ko-KR" altLang="en-US" smtClean="0"/>
-              <a:t>2026-03-26</a:t>
+              <a:t>2026-05-01</a:t>
             </a:fld>
             <a:endParaRPr lang="ko-KR" altLang="en-US"/>
           </a:p>
@@ -1404,7 +1404,7 @@
           <a:p>
             <a:fld id="{9021E875-82EE-4D84-97F4-14491609B700}" type="datetimeFigureOut">
               <a:rPr lang="ko-KR" altLang="en-US" smtClean="0"/>
-              <a:t>2026-03-26</a:t>
+              <a:t>2026-05-01</a:t>
             </a:fld>
             <a:endParaRPr lang="ko-KR" altLang="en-US"/>
           </a:p>
@@ -1816,7 +1816,7 @@
           <a:p>
             <a:fld id="{9021E875-82EE-4D84-97F4-14491609B700}" type="datetimeFigureOut">
               <a:rPr lang="ko-KR" altLang="en-US" smtClean="0"/>
-              <a:t>2026-03-26</a:t>
+              <a:t>2026-05-01</a:t>
             </a:fld>
             <a:endParaRPr lang="ko-KR" altLang="en-US"/>
           </a:p>
@@ -1957,7 +1957,7 @@
           <a:p>
             <a:fld id="{9021E875-82EE-4D84-97F4-14491609B700}" type="datetimeFigureOut">
               <a:rPr lang="ko-KR" altLang="en-US" smtClean="0"/>
-              <a:t>2026-03-26</a:t>
+              <a:t>2026-05-01</a:t>
             </a:fld>
             <a:endParaRPr lang="ko-KR" altLang="en-US"/>
           </a:p>
@@ -2070,7 +2070,7 @@
           <a:p>
             <a:fld id="{9021E875-82EE-4D84-97F4-14491609B700}" type="datetimeFigureOut">
               <a:rPr lang="ko-KR" altLang="en-US" smtClean="0"/>
-              <a:t>2026-03-26</a:t>
+              <a:t>2026-05-01</a:t>
             </a:fld>
             <a:endParaRPr lang="ko-KR" altLang="en-US"/>
           </a:p>
@@ -2381,7 +2381,7 @@
           <a:p>
             <a:fld id="{9021E875-82EE-4D84-97F4-14491609B700}" type="datetimeFigureOut">
               <a:rPr lang="ko-KR" altLang="en-US" smtClean="0"/>
-              <a:t>2026-03-26</a:t>
+              <a:t>2026-05-01</a:t>
             </a:fld>
             <a:endParaRPr lang="ko-KR" altLang="en-US"/>
           </a:p>
@@ -2669,7 +2669,7 @@
           <a:p>
             <a:fld id="{9021E875-82EE-4D84-97F4-14491609B700}" type="datetimeFigureOut">
               <a:rPr lang="ko-KR" altLang="en-US" smtClean="0"/>
-              <a:t>2026-03-26</a:t>
+              <a:t>2026-05-01</a:t>
             </a:fld>
             <a:endParaRPr lang="ko-KR" altLang="en-US"/>
           </a:p>
@@ -2910,7 +2910,7 @@
           <a:p>
             <a:fld id="{9021E875-82EE-4D84-97F4-14491609B700}" type="datetimeFigureOut">
               <a:rPr lang="ko-KR" altLang="en-US" smtClean="0"/>
-              <a:t>2026-03-26</a:t>
+              <a:t>2026-05-01</a:t>
             </a:fld>
             <a:endParaRPr lang="ko-KR" altLang="en-US"/>
           </a:p>
@@ -3342,16 +3342,22 @@
           <p:nvPr/>
         </p:nvPicPr>
         <p:blipFill>
-          <a:blip r:embed="rId2"/>
-          <a:srcRect r="20313"/>
+          <a:blip r:embed="rId2">
+            <a:extLst>
+              <a:ext uri="{28A0092B-C50C-407E-A947-70E740481C1C}">
+                <a14:useLocalDpi xmlns:a14="http://schemas.microsoft.com/office/drawing/2010/main" val="0"/>
+              </a:ext>
+            </a:extLst>
+          </a:blip>
+          <a:srcRect l="-169" t="164" r="-169" b="943"/>
           <a:stretch>
             <a:fillRect/>
           </a:stretch>
         </p:blipFill>
         <p:spPr>
           <a:xfrm>
-            <a:off x="337821" y="1893455"/>
-            <a:ext cx="3537527" cy="2676899"/>
+            <a:off x="337821" y="1893456"/>
+            <a:ext cx="3537527" cy="2410162"/>
           </a:xfrm>
           <a:prstGeom prst="rect">
             <a:avLst/>
@@ -3373,15 +3379,20 @@
           <p:nvPr/>
         </p:nvPicPr>
         <p:blipFill>
-          <a:blip r:embed="rId3"/>
-          <a:stretch>
-            <a:fillRect/>
-          </a:stretch>
+          <a:blip r:embed="rId3">
+            <a:extLst>
+              <a:ext uri="{28A0092B-C50C-407E-A947-70E740481C1C}">
+                <a14:useLocalDpi xmlns:a14="http://schemas.microsoft.com/office/drawing/2010/main" val="0"/>
+              </a:ext>
+            </a:extLst>
+          </a:blip>
+          <a:srcRect/>
+          <a:stretch/>
         </p:blipFill>
         <p:spPr>
           <a:xfrm>
-            <a:off x="4771701" y="1893455"/>
-            <a:ext cx="3959303" cy="2682571"/>
+            <a:off x="4771701" y="1973198"/>
+            <a:ext cx="3959303" cy="2523084"/>
           </a:xfrm>
           <a:prstGeom prst="rect">
             <a:avLst/>
@@ -3449,15 +3460,22 @@
           <p:nvPr/>
         </p:nvPicPr>
         <p:blipFill>
-          <a:blip r:embed="rId4"/>
+          <a:blip r:embed="rId4">
+            <a:extLst>
+              <a:ext uri="{28A0092B-C50C-407E-A947-70E740481C1C}">
+                <a14:useLocalDpi xmlns:a14="http://schemas.microsoft.com/office/drawing/2010/main" val="0"/>
+              </a:ext>
+            </a:extLst>
+          </a:blip>
+          <a:srcRect l="11561"/>
           <a:stretch>
             <a:fillRect/>
           </a:stretch>
         </p:blipFill>
         <p:spPr>
           <a:xfrm>
-            <a:off x="9396895" y="1891717"/>
-            <a:ext cx="2019582" cy="3924848"/>
+            <a:off x="9326833" y="1973198"/>
+            <a:ext cx="2484495" cy="3797920"/>
           </a:xfrm>
           <a:prstGeom prst="rect">
             <a:avLst/>
@@ -3539,15 +3557,15 @@
             </a:r>
             <a:r>
               <a:rPr lang="en-US" altLang="ko-KR" sz="1200" dirty="0"/>
-              <a:t>“</a:t>
-            </a:r>
-            <a:r>
-              <a:rPr lang="ko-KR" altLang="en-US" sz="1200" dirty="0" err="1"/>
-              <a:t>chzzk-statistics-dock.pages.dev</a:t>
+              <a:t>“https://cheese-stick-</a:t>
+            </a:r>
+            <a:r>
+              <a:rPr lang="en-US" altLang="ko-KR" sz="1200" dirty="0" err="1"/>
+              <a:t>dock.pages.dev</a:t>
             </a:r>
             <a:r>
               <a:rPr lang="en-US" altLang="ko-KR" sz="1200" dirty="0"/>
-              <a:t>”</a:t>
+              <a:t>/”</a:t>
             </a:r>
             <a:r>
               <a:rPr lang="ko-KR" altLang="en-US" sz="1200" dirty="0"/>
@@ -4014,7 +4032,7 @@
         </p:nvSpPr>
         <p:spPr>
           <a:xfrm>
-            <a:off x="9396894" y="5371960"/>
+            <a:off x="9489258" y="5371960"/>
             <a:ext cx="1987386" cy="381140"/>
           </a:xfrm>
           <a:prstGeom prst="roundRect">
@@ -4104,15 +4122,20 @@
           <p:nvPr/>
         </p:nvPicPr>
         <p:blipFill>
-          <a:blip r:embed="rId2"/>
-          <a:stretch>
-            <a:fillRect/>
-          </a:stretch>
+          <a:blip r:embed="rId2">
+            <a:extLst>
+              <a:ext uri="{28A0092B-C50C-407E-A947-70E740481C1C}">
+                <a14:useLocalDpi xmlns:a14="http://schemas.microsoft.com/office/drawing/2010/main" val="0"/>
+              </a:ext>
+            </a:extLst>
+          </a:blip>
+          <a:srcRect/>
+          <a:stretch/>
         </p:blipFill>
         <p:spPr>
           <a:xfrm>
-            <a:off x="3913338" y="266401"/>
-            <a:ext cx="4591691" cy="6106377"/>
+            <a:off x="4032878" y="266401"/>
+            <a:ext cx="4205160" cy="6475278"/>
           </a:xfrm>
           <a:prstGeom prst="rect">
             <a:avLst/>
@@ -4134,15 +4157,22 @@
           <p:nvPr/>
         </p:nvPicPr>
         <p:blipFill>
-          <a:blip r:embed="rId3"/>
+          <a:blip r:embed="rId3">
+            <a:extLst>
+              <a:ext uri="{28A0092B-C50C-407E-A947-70E740481C1C}">
+                <a14:useLocalDpi xmlns:a14="http://schemas.microsoft.com/office/drawing/2010/main" val="0"/>
+              </a:ext>
+            </a:extLst>
+          </a:blip>
+          <a:srcRect t="12339" b="5304"/>
           <a:stretch>
             <a:fillRect/>
           </a:stretch>
         </p:blipFill>
         <p:spPr>
           <a:xfrm>
-            <a:off x="213795" y="1010275"/>
-            <a:ext cx="3266270" cy="2113469"/>
+            <a:off x="59685" y="966342"/>
+            <a:ext cx="3695230" cy="2352167"/>
           </a:xfrm>
           <a:prstGeom prst="rect">
             <a:avLst/>
@@ -4172,7 +4202,7 @@
         </p:blipFill>
         <p:spPr>
           <a:xfrm>
-            <a:off x="8938302" y="1807881"/>
+            <a:off x="8744791" y="1807881"/>
             <a:ext cx="3122884" cy="1551453"/>
           </a:xfrm>
           <a:prstGeom prst="rect">
@@ -4224,8 +4254,8 @@
         </p:nvSpPr>
         <p:spPr>
           <a:xfrm>
-            <a:off x="408216" y="2451552"/>
-            <a:ext cx="2919682" cy="481655"/>
+            <a:off x="285797" y="2232754"/>
+            <a:ext cx="3194267" cy="481655"/>
           </a:xfrm>
           <a:prstGeom prst="roundRect">
             <a:avLst/>
@@ -4277,7 +4307,7 @@
         </p:nvSpPr>
         <p:spPr>
           <a:xfrm>
-            <a:off x="418179" y="3132679"/>
+            <a:off x="418179" y="3318509"/>
             <a:ext cx="2857503" cy="276999"/>
           </a:xfrm>
           <a:prstGeom prst="rect">
@@ -4413,7 +4443,7 @@
         </p:nvSpPr>
         <p:spPr>
           <a:xfrm>
-            <a:off x="3765903" y="98719"/>
+            <a:off x="3812537" y="98719"/>
             <a:ext cx="294870" cy="294870"/>
           </a:xfrm>
           <a:prstGeom prst="ellipse">
@@ -4546,7 +4576,7 @@
         </p:nvSpPr>
         <p:spPr>
           <a:xfrm>
-            <a:off x="8938302" y="880711"/>
+            <a:off x="8744791" y="880711"/>
             <a:ext cx="2857503" cy="276999"/>
           </a:xfrm>
           <a:prstGeom prst="rect">
@@ -4584,7 +4614,7 @@
         </p:nvCxnSpPr>
         <p:spPr>
           <a:xfrm flipV="1">
-            <a:off x="8125691" y="1019211"/>
+            <a:off x="7932180" y="1019211"/>
             <a:ext cx="812611" cy="373171"/>
           </a:xfrm>
           <a:prstGeom prst="straightConnector1">
@@ -4629,7 +4659,7 @@
         </p:nvCxnSpPr>
         <p:spPr>
           <a:xfrm flipV="1">
-            <a:off x="8098723" y="1669382"/>
+            <a:off x="7905212" y="1669382"/>
             <a:ext cx="839578" cy="401946"/>
           </a:xfrm>
           <a:prstGeom prst="straightConnector1">
@@ -4671,7 +4701,7 @@
         </p:nvSpPr>
         <p:spPr>
           <a:xfrm>
-            <a:off x="8938301" y="1530882"/>
+            <a:off x="8744790" y="1530882"/>
             <a:ext cx="2857503" cy="276999"/>
           </a:xfrm>
           <a:prstGeom prst="rect">
@@ -4707,7 +4737,7 @@
         </p:nvSpPr>
         <p:spPr>
           <a:xfrm>
-            <a:off x="9003817" y="3355260"/>
+            <a:off x="8810306" y="3355260"/>
             <a:ext cx="2857503" cy="276999"/>
           </a:xfrm>
           <a:prstGeom prst="rect">
@@ -4745,8 +4775,8 @@
         </p:nvCxnSpPr>
         <p:spPr>
           <a:xfrm>
-            <a:off x="8301876" y="3210862"/>
-            <a:ext cx="701941" cy="879468"/>
+            <a:off x="7932180" y="3142455"/>
+            <a:ext cx="878126" cy="947875"/>
           </a:xfrm>
           <a:prstGeom prst="straightConnector1">
             <a:avLst/>
@@ -4787,7 +4817,7 @@
         </p:nvSpPr>
         <p:spPr>
           <a:xfrm>
-            <a:off x="9003817" y="3951830"/>
+            <a:off x="8810306" y="3951830"/>
             <a:ext cx="2857503" cy="276999"/>
           </a:xfrm>
           <a:prstGeom prst="rect">
@@ -4819,14 +4849,13 @@
           </p:cNvPr>
           <p:cNvCxnSpPr>
             <a:cxnSpLocks/>
-            <a:endCxn id="38" idx="1"/>
           </p:cNvCxnSpPr>
           <p:nvPr/>
         </p:nvCxnSpPr>
         <p:spPr>
           <a:xfrm>
-            <a:off x="8125691" y="4498868"/>
-            <a:ext cx="878126" cy="546345"/>
+            <a:off x="7932180" y="4498868"/>
+            <a:ext cx="898072" cy="310665"/>
           </a:xfrm>
           <a:prstGeom prst="straightConnector1">
             <a:avLst/>
@@ -4867,8 +4896,8 @@
         </p:nvSpPr>
         <p:spPr>
           <a:xfrm>
-            <a:off x="9003817" y="4629714"/>
-            <a:ext cx="3188183" cy="830997"/>
+            <a:off x="8810306" y="4629714"/>
+            <a:ext cx="3188183" cy="692497"/>
           </a:xfrm>
           <a:prstGeom prst="rect">
             <a:avLst/>
@@ -4916,7 +4945,7 @@
             <a:endParaRPr lang="en-US" altLang="ko-KR" sz="1200" dirty="0"/>
           </a:p>
           <a:p>
-            <a:endParaRPr lang="en-US" altLang="ko-KR" sz="1200" dirty="0"/>
+            <a:endParaRPr lang="en-US" altLang="ko-KR" sz="300" dirty="0"/>
           </a:p>
           <a:p>
             <a:r>
@@ -4940,7 +4969,7 @@
         </p:nvSpPr>
         <p:spPr>
           <a:xfrm>
-            <a:off x="9003817" y="6019754"/>
+            <a:off x="8810306" y="6315318"/>
             <a:ext cx="2857503" cy="276999"/>
           </a:xfrm>
           <a:prstGeom prst="rect">
@@ -4955,10 +4984,9 @@
           <a:lstStyle/>
           <a:p>
             <a:r>
-              <a:rPr lang="ko-KR" altLang="en-US" sz="1200"/>
+              <a:rPr lang="ko-KR" altLang="en-US" sz="1200" dirty="0"/>
               <a:t>로그아웃 하여 연동 해제</a:t>
             </a:r>
-            <a:endParaRPr lang="ko-KR" altLang="en-US" sz="1200" dirty="0"/>
           </a:p>
         </p:txBody>
       </p:sp>
@@ -4979,8 +5007,93 @@
         </p:nvCxnSpPr>
         <p:spPr>
           <a:xfrm>
-            <a:off x="8301876" y="6158254"/>
-            <a:ext cx="701941" cy="0"/>
+            <a:off x="7932180" y="6453818"/>
+            <a:ext cx="878126" cy="0"/>
+          </a:xfrm>
+          <a:prstGeom prst="straightConnector1">
+            <a:avLst/>
+          </a:prstGeom>
+          <a:ln w="28575">
+            <a:solidFill>
+              <a:srgbClr val="FF0000"/>
+            </a:solidFill>
+            <a:tailEnd type="triangle"/>
+          </a:ln>
+        </p:spPr>
+        <p:style>
+          <a:lnRef idx="1">
+            <a:schemeClr val="accent1"/>
+          </a:lnRef>
+          <a:fillRef idx="0">
+            <a:schemeClr val="accent1"/>
+          </a:fillRef>
+          <a:effectRef idx="0">
+            <a:schemeClr val="accent1"/>
+          </a:effectRef>
+          <a:fontRef idx="minor">
+            <a:schemeClr val="tx1"/>
+          </a:fontRef>
+        </p:style>
+      </p:cxnSp>
+      <p:sp>
+        <p:nvSpPr>
+          <p:cNvPr id="2" name="TextBox 1">
+            <a:extLst>
+              <a:ext uri="{FF2B5EF4-FFF2-40B4-BE49-F238E27FC236}">
+                <a16:creationId xmlns:a16="http://schemas.microsoft.com/office/drawing/2014/main" id="{B8894B05-930E-F2C2-A6A1-B48CC58B7386}"/>
+              </a:ext>
+            </a:extLst>
+          </p:cNvPr>
+          <p:cNvSpPr txBox="1"/>
+          <p:nvPr/>
+        </p:nvSpPr>
+        <p:spPr>
+          <a:xfrm>
+            <a:off x="8810306" y="5798082"/>
+            <a:ext cx="2857503" cy="276999"/>
+          </a:xfrm>
+          <a:prstGeom prst="rect">
+            <a:avLst/>
+          </a:prstGeom>
+          <a:noFill/>
+        </p:spPr>
+        <p:txBody>
+          <a:bodyPr wrap="square">
+            <a:spAutoFit/>
+          </a:bodyPr>
+          <a:lstStyle/>
+          <a:p>
+            <a:r>
+              <a:rPr lang="ko-KR" altLang="en-US" sz="1200" dirty="0"/>
+              <a:t>통계를 최신으로 </a:t>
+            </a:r>
+            <a:r>
+              <a:rPr lang="ko-KR" altLang="en-US" sz="1200" dirty="0" err="1"/>
+              <a:t>새로고침</a:t>
+            </a:r>
+            <a:endParaRPr lang="ko-KR" altLang="en-US" sz="1200" dirty="0"/>
+          </a:p>
+        </p:txBody>
+      </p:sp>
+      <p:cxnSp>
+        <p:nvCxnSpPr>
+          <p:cNvPr id="5" name="직선 화살표 연결선 4">
+            <a:extLst>
+              <a:ext uri="{FF2B5EF4-FFF2-40B4-BE49-F238E27FC236}">
+                <a16:creationId xmlns:a16="http://schemas.microsoft.com/office/drawing/2014/main" id="{84490E36-4F8D-32E1-6766-3417C8F7A599}"/>
+              </a:ext>
+            </a:extLst>
+          </p:cNvPr>
+          <p:cNvCxnSpPr>
+            <a:cxnSpLocks/>
+            <a:endCxn id="2" idx="1"/>
+          </p:cNvCxnSpPr>
+          <p:nvPr/>
+        </p:nvCxnSpPr>
+        <p:spPr>
+          <a:xfrm>
+            <a:off x="7932180" y="5936582"/>
+            <a:ext cx="878126" cy="0"/>
           </a:xfrm>
           <a:prstGeom prst="straightConnector1">
             <a:avLst/>
